--- a/Team 6/CUAI_Datathon_6team.pptx
+++ b/Team 6/CUAI_Datathon_6team.pptx
@@ -271,6 +271,7 @@
 <file path=ppt/revisionInfo.xml><?xml version="1.0" encoding="utf-8"?>
 <p1510:revInfo xmlns:a="http://schemas.openxmlformats.org/drawingml/2006/main" xmlns:r="http://schemas.openxmlformats.org/officeDocument/2006/relationships" xmlns:p1510="http://schemas.microsoft.com/office/powerpoint/2015/10/main">
   <p1510:revLst>
+    <p1510:client id="{084BBF93-721C-0B93-F542-F4848FB7194F}" v="8" dt="2026-03-29T12:14:02.055"/>
     <p1510:client id="{42776C5C-90F5-5C6C-2C67-0A28682D6E59}" v="2745" dt="2026-03-29T12:05:10.048"/>
     <p1510:client id="{513ADF41-C081-3BD9-218E-F382AE5BC52A}" v="64" dt="2026-03-29T11:27:48.103"/>
   </p1510:revLst>
@@ -8050,7 +8051,7 @@
             </a:pPr>
             <a:r>
               <a:rPr lang="ko-KR" altLang="en-US"/>
-              <a:t>최근 2개월 데이터를 validation set으로 시간 흐름 바녕ㅇ</a:t>
+              <a:t>최근 2개월 데이터를 validation set으로 시간 흐름 반영</a:t>
             </a:r>
           </a:p>
         </p:txBody>

--- a/Team 6/CUAI_Datathon_6team.pptx
+++ b/Team 6/CUAI_Datathon_6team.pptx
@@ -5,18 +5,19 @@
     <p:sldMasterId id="2147483659" r:id="rId1"/>
   </p:sldMasterIdLst>
   <p:notesMasterIdLst>
-    <p:notesMasterId r:id="rId11"/>
+    <p:notesMasterId r:id="rId12"/>
   </p:notesMasterIdLst>
   <p:sldIdLst>
     <p:sldId id="256" r:id="rId2"/>
     <p:sldId id="263" r:id="rId3"/>
-    <p:sldId id="287" r:id="rId4"/>
-    <p:sldId id="288" r:id="rId5"/>
-    <p:sldId id="289" r:id="rId6"/>
-    <p:sldId id="290" r:id="rId7"/>
-    <p:sldId id="291" r:id="rId8"/>
-    <p:sldId id="292" r:id="rId9"/>
-    <p:sldId id="277" r:id="rId10"/>
+    <p:sldId id="293" r:id="rId4"/>
+    <p:sldId id="287" r:id="rId5"/>
+    <p:sldId id="288" r:id="rId6"/>
+    <p:sldId id="289" r:id="rId7"/>
+    <p:sldId id="290" r:id="rId8"/>
+    <p:sldId id="291" r:id="rId9"/>
+    <p:sldId id="292" r:id="rId10"/>
+    <p:sldId id="277" r:id="rId11"/>
   </p:sldIdLst>
   <p:sldSz cx="9144000" cy="5143500" type="screen16x9"/>
   <p:notesSz cx="6858000" cy="9144000"/>
@@ -823,6 +824,133 @@
 </p:notes>
 </file>
 
+<file path=ppt/notesSlides/notesSlide10.xml><?xml version="1.0" encoding="utf-8"?>
+<p:notes xmlns:a="http://schemas.openxmlformats.org/drawingml/2006/main" xmlns:r="http://schemas.openxmlformats.org/officeDocument/2006/relationships" xmlns:p="http://schemas.openxmlformats.org/presentationml/2006/main" showMasterSp="0" showMasterPhAnim="0">
+  <p:cSld>
+    <p:spTree>
+      <p:nvGrpSpPr>
+        <p:cNvPr id="1" name="Shape 76">
+          <a:extLst>
+            <a:ext uri="{FF2B5EF4-FFF2-40B4-BE49-F238E27FC236}">
+              <a16:creationId xmlns:a16="http://schemas.microsoft.com/office/drawing/2014/main" id="{FCBDEB0A-C772-348F-AF81-0DA5E0E0AB2C}"/>
+            </a:ext>
+          </a:extLst>
+        </p:cNvPr>
+        <p:cNvGrpSpPr/>
+        <p:nvPr/>
+      </p:nvGrpSpPr>
+      <p:grpSpPr>
+        <a:xfrm>
+          <a:off x="0" y="0"/>
+          <a:ext cx="0" cy="0"/>
+          <a:chOff x="0" y="0"/>
+          <a:chExt cx="0" cy="0"/>
+        </a:xfrm>
+      </p:grpSpPr>
+      <p:sp>
+        <p:nvSpPr>
+          <p:cNvPr id="77" name="Google Shape;77;g118d7eca593_0_30:notes">
+            <a:extLst>
+              <a:ext uri="{FF2B5EF4-FFF2-40B4-BE49-F238E27FC236}">
+                <a16:creationId xmlns:a16="http://schemas.microsoft.com/office/drawing/2014/main" id="{23B23B72-F599-505C-FC29-4F86ECBBF63C}"/>
+              </a:ext>
+            </a:extLst>
+          </p:cNvPr>
+          <p:cNvSpPr>
+            <a:spLocks noGrp="1" noRot="1" noChangeAspect="1"/>
+          </p:cNvSpPr>
+          <p:nvPr>
+            <p:ph type="sldImg" idx="2"/>
+          </p:nvPr>
+        </p:nvSpPr>
+        <p:spPr>
+          <a:xfrm>
+            <a:off x="381000" y="685800"/>
+            <a:ext cx="6096000" cy="3429000"/>
+          </a:xfrm>
+          <a:custGeom>
+            <a:avLst/>
+            <a:gdLst/>
+            <a:ahLst/>
+            <a:cxnLst/>
+            <a:rect l="l" t="t" r="r" b="b"/>
+            <a:pathLst>
+              <a:path w="120000" h="120000" extrusionOk="0">
+                <a:moveTo>
+                  <a:pt x="0" y="0"/>
+                </a:moveTo>
+                <a:lnTo>
+                  <a:pt x="120000" y="0"/>
+                </a:lnTo>
+                <a:lnTo>
+                  <a:pt x="120000" y="120000"/>
+                </a:lnTo>
+                <a:lnTo>
+                  <a:pt x="0" y="120000"/>
+                </a:lnTo>
+                <a:close/>
+              </a:path>
+            </a:pathLst>
+          </a:custGeom>
+        </p:spPr>
+      </p:sp>
+      <p:sp>
+        <p:nvSpPr>
+          <p:cNvPr id="78" name="Google Shape;78;g118d7eca593_0_30:notes">
+            <a:extLst>
+              <a:ext uri="{FF2B5EF4-FFF2-40B4-BE49-F238E27FC236}">
+                <a16:creationId xmlns:a16="http://schemas.microsoft.com/office/drawing/2014/main" id="{51E07B03-2FC8-03AD-7677-06BA6AB23CBB}"/>
+              </a:ext>
+            </a:extLst>
+          </p:cNvPr>
+          <p:cNvSpPr txBox="1">
+            <a:spLocks noGrp="1"/>
+          </p:cNvSpPr>
+          <p:nvPr>
+            <p:ph type="body" idx="1"/>
+          </p:nvPr>
+        </p:nvSpPr>
+        <p:spPr>
+          <a:xfrm>
+            <a:off x="685800" y="4343400"/>
+            <a:ext cx="5486400" cy="4114800"/>
+          </a:xfrm>
+          <a:prstGeom prst="rect">
+            <a:avLst/>
+          </a:prstGeom>
+        </p:spPr>
+        <p:txBody>
+          <a:bodyPr spcFirstLastPara="1" wrap="square" lIns="91425" tIns="91425" rIns="91425" bIns="91425" anchor="t" anchorCtr="0">
+            <a:noAutofit/>
+          </a:bodyPr>
+          <a:lstStyle/>
+          <a:p>
+            <a:pPr marL="0" lvl="0" indent="0" algn="l" rtl="0">
+              <a:spcBef>
+                <a:spcPts val="0"/>
+              </a:spcBef>
+              <a:spcAft>
+                <a:spcPts val="0"/>
+              </a:spcAft>
+              <a:buNone/>
+            </a:pPr>
+            <a:endParaRPr/>
+          </a:p>
+        </p:txBody>
+      </p:sp>
+    </p:spTree>
+    <p:extLst>
+      <p:ext uri="{BB962C8B-B14F-4D97-AF65-F5344CB8AC3E}">
+        <p14:creationId xmlns:p14="http://schemas.microsoft.com/office/powerpoint/2010/main" val="2112957971"/>
+      </p:ext>
+    </p:extLst>
+  </p:cSld>
+  <p:clrMapOvr>
+    <a:masterClrMapping/>
+  </p:clrMapOvr>
+</p:notes>
+</file>
+
 <file path=ppt/notesSlides/notesSlide2.xml><?xml version="1.0" encoding="utf-8"?>
 <p:notes xmlns:a="http://schemas.openxmlformats.org/drawingml/2006/main" xmlns:r="http://schemas.openxmlformats.org/officeDocument/2006/relationships" xmlns:p="http://schemas.openxmlformats.org/presentationml/2006/main" showMasterSp="0" showMasterPhAnim="0">
   <p:cSld>
@@ -958,6 +1086,133 @@
         <p:cNvPr id="1" name="Shape 76">
           <a:extLst>
             <a:ext uri="{FF2B5EF4-FFF2-40B4-BE49-F238E27FC236}">
+              <a16:creationId xmlns:a16="http://schemas.microsoft.com/office/drawing/2014/main" id="{0DDE0AC0-0E2F-C4AD-4096-284C0D157B00}"/>
+            </a:ext>
+          </a:extLst>
+        </p:cNvPr>
+        <p:cNvGrpSpPr/>
+        <p:nvPr/>
+      </p:nvGrpSpPr>
+      <p:grpSpPr>
+        <a:xfrm>
+          <a:off x="0" y="0"/>
+          <a:ext cx="0" cy="0"/>
+          <a:chOff x="0" y="0"/>
+          <a:chExt cx="0" cy="0"/>
+        </a:xfrm>
+      </p:grpSpPr>
+      <p:sp>
+        <p:nvSpPr>
+          <p:cNvPr id="77" name="Google Shape;77;g118d7eca593_0_30:notes">
+            <a:extLst>
+              <a:ext uri="{FF2B5EF4-FFF2-40B4-BE49-F238E27FC236}">
+                <a16:creationId xmlns:a16="http://schemas.microsoft.com/office/drawing/2014/main" id="{FFC5E868-0683-D913-7882-2DB6FB23C8ED}"/>
+              </a:ext>
+            </a:extLst>
+          </p:cNvPr>
+          <p:cNvSpPr>
+            <a:spLocks noGrp="1" noRot="1" noChangeAspect="1"/>
+          </p:cNvSpPr>
+          <p:nvPr>
+            <p:ph type="sldImg" idx="2"/>
+          </p:nvPr>
+        </p:nvSpPr>
+        <p:spPr>
+          <a:xfrm>
+            <a:off x="381000" y="685800"/>
+            <a:ext cx="6096000" cy="3429000"/>
+          </a:xfrm>
+          <a:custGeom>
+            <a:avLst/>
+            <a:gdLst/>
+            <a:ahLst/>
+            <a:cxnLst/>
+            <a:rect l="l" t="t" r="r" b="b"/>
+            <a:pathLst>
+              <a:path w="120000" h="120000" extrusionOk="0">
+                <a:moveTo>
+                  <a:pt x="0" y="0"/>
+                </a:moveTo>
+                <a:lnTo>
+                  <a:pt x="120000" y="0"/>
+                </a:lnTo>
+                <a:lnTo>
+                  <a:pt x="120000" y="120000"/>
+                </a:lnTo>
+                <a:lnTo>
+                  <a:pt x="0" y="120000"/>
+                </a:lnTo>
+                <a:close/>
+              </a:path>
+            </a:pathLst>
+          </a:custGeom>
+        </p:spPr>
+      </p:sp>
+      <p:sp>
+        <p:nvSpPr>
+          <p:cNvPr id="78" name="Google Shape;78;g118d7eca593_0_30:notes">
+            <a:extLst>
+              <a:ext uri="{FF2B5EF4-FFF2-40B4-BE49-F238E27FC236}">
+                <a16:creationId xmlns:a16="http://schemas.microsoft.com/office/drawing/2014/main" id="{B3DB2DC8-A56F-63C6-3AEC-E4DB2255B996}"/>
+              </a:ext>
+            </a:extLst>
+          </p:cNvPr>
+          <p:cNvSpPr txBox="1">
+            <a:spLocks noGrp="1"/>
+          </p:cNvSpPr>
+          <p:nvPr>
+            <p:ph type="body" idx="1"/>
+          </p:nvPr>
+        </p:nvSpPr>
+        <p:spPr>
+          <a:xfrm>
+            <a:off x="685800" y="4343400"/>
+            <a:ext cx="5486400" cy="4114800"/>
+          </a:xfrm>
+          <a:prstGeom prst="rect">
+            <a:avLst/>
+          </a:prstGeom>
+        </p:spPr>
+        <p:txBody>
+          <a:bodyPr spcFirstLastPara="1" wrap="square" lIns="91425" tIns="91425" rIns="91425" bIns="91425" anchor="t" anchorCtr="0">
+            <a:noAutofit/>
+          </a:bodyPr>
+          <a:lstStyle/>
+          <a:p>
+            <a:pPr marL="0" lvl="0" indent="0" algn="l" rtl="0">
+              <a:spcBef>
+                <a:spcPts val="0"/>
+              </a:spcBef>
+              <a:spcAft>
+                <a:spcPts val="0"/>
+              </a:spcAft>
+              <a:buNone/>
+            </a:pPr>
+            <a:endParaRPr/>
+          </a:p>
+        </p:txBody>
+      </p:sp>
+    </p:spTree>
+    <p:extLst>
+      <p:ext uri="{BB962C8B-B14F-4D97-AF65-F5344CB8AC3E}">
+        <p14:creationId xmlns:p14="http://schemas.microsoft.com/office/powerpoint/2010/main" val="1069783613"/>
+      </p:ext>
+    </p:extLst>
+  </p:cSld>
+  <p:clrMapOvr>
+    <a:masterClrMapping/>
+  </p:clrMapOvr>
+</p:notes>
+</file>
+
+<file path=ppt/notesSlides/notesSlide4.xml><?xml version="1.0" encoding="utf-8"?>
+<p:notes xmlns:a="http://schemas.openxmlformats.org/drawingml/2006/main" xmlns:r="http://schemas.openxmlformats.org/officeDocument/2006/relationships" xmlns:p="http://schemas.openxmlformats.org/presentationml/2006/main" showMasterSp="0" showMasterPhAnim="0">
+  <p:cSld>
+    <p:spTree>
+      <p:nvGrpSpPr>
+        <p:cNvPr id="1" name="Shape 76">
+          <a:extLst>
+            <a:ext uri="{FF2B5EF4-FFF2-40B4-BE49-F238E27FC236}">
               <a16:creationId xmlns:a16="http://schemas.microsoft.com/office/drawing/2014/main" id="{C2EDBD03-83B5-1756-43C7-E432412E72E4}"/>
             </a:ext>
           </a:extLst>
@@ -1077,7 +1332,7 @@
 </p:notes>
 </file>
 
-<file path=ppt/notesSlides/notesSlide4.xml><?xml version="1.0" encoding="utf-8"?>
+<file path=ppt/notesSlides/notesSlide5.xml><?xml version="1.0" encoding="utf-8"?>
 <p:notes xmlns:a="http://schemas.openxmlformats.org/drawingml/2006/main" xmlns:r="http://schemas.openxmlformats.org/officeDocument/2006/relationships" xmlns:p="http://schemas.openxmlformats.org/presentationml/2006/main" showMasterSp="0" showMasterPhAnim="0">
   <p:cSld>
     <p:spTree>
@@ -1204,7 +1459,7 @@
 </p:notes>
 </file>
 
-<file path=ppt/notesSlides/notesSlide5.xml><?xml version="1.0" encoding="utf-8"?>
+<file path=ppt/notesSlides/notesSlide6.xml><?xml version="1.0" encoding="utf-8"?>
 <p:notes xmlns:a="http://schemas.openxmlformats.org/drawingml/2006/main" xmlns:r="http://schemas.openxmlformats.org/officeDocument/2006/relationships" xmlns:p="http://schemas.openxmlformats.org/presentationml/2006/main" showMasterSp="0" showMasterPhAnim="0">
   <p:cSld>
     <p:spTree>
@@ -1331,7 +1586,7 @@
 </p:notes>
 </file>
 
-<file path=ppt/notesSlides/notesSlide6.xml><?xml version="1.0" encoding="utf-8"?>
+<file path=ppt/notesSlides/notesSlide7.xml><?xml version="1.0" encoding="utf-8"?>
 <p:notes xmlns:a="http://schemas.openxmlformats.org/drawingml/2006/main" xmlns:r="http://schemas.openxmlformats.org/officeDocument/2006/relationships" xmlns:p="http://schemas.openxmlformats.org/presentationml/2006/main" showMasterSp="0" showMasterPhAnim="0">
   <p:cSld>
     <p:spTree>
@@ -1458,7 +1713,7 @@
 </p:notes>
 </file>
 
-<file path=ppt/notesSlides/notesSlide7.xml><?xml version="1.0" encoding="utf-8"?>
+<file path=ppt/notesSlides/notesSlide8.xml><?xml version="1.0" encoding="utf-8"?>
 <p:notes xmlns:a="http://schemas.openxmlformats.org/drawingml/2006/main" xmlns:r="http://schemas.openxmlformats.org/officeDocument/2006/relationships" xmlns:p="http://schemas.openxmlformats.org/presentationml/2006/main" showMasterSp="0" showMasterPhAnim="0">
   <p:cSld>
     <p:spTree>
@@ -1585,7 +1840,7 @@
 </p:notes>
 </file>
 
-<file path=ppt/notesSlides/notesSlide8.xml><?xml version="1.0" encoding="utf-8"?>
+<file path=ppt/notesSlides/notesSlide9.xml><?xml version="1.0" encoding="utf-8"?>
 <p:notes xmlns:a="http://schemas.openxmlformats.org/drawingml/2006/main" xmlns:r="http://schemas.openxmlformats.org/officeDocument/2006/relationships" xmlns:p="http://schemas.openxmlformats.org/presentationml/2006/main" showMasterSp="0" showMasterPhAnim="0">
   <p:cSld>
     <p:spTree>
@@ -1703,133 +1958,6 @@
     <p:extLst>
       <p:ext uri="{BB962C8B-B14F-4D97-AF65-F5344CB8AC3E}">
         <p14:creationId xmlns:p14="http://schemas.microsoft.com/office/powerpoint/2010/main" val="819826147"/>
-      </p:ext>
-    </p:extLst>
-  </p:cSld>
-  <p:clrMapOvr>
-    <a:masterClrMapping/>
-  </p:clrMapOvr>
-</p:notes>
-</file>
-
-<file path=ppt/notesSlides/notesSlide9.xml><?xml version="1.0" encoding="utf-8"?>
-<p:notes xmlns:a="http://schemas.openxmlformats.org/drawingml/2006/main" xmlns:r="http://schemas.openxmlformats.org/officeDocument/2006/relationships" xmlns:p="http://schemas.openxmlformats.org/presentationml/2006/main" showMasterSp="0" showMasterPhAnim="0">
-  <p:cSld>
-    <p:spTree>
-      <p:nvGrpSpPr>
-        <p:cNvPr id="1" name="Shape 76">
-          <a:extLst>
-            <a:ext uri="{FF2B5EF4-FFF2-40B4-BE49-F238E27FC236}">
-              <a16:creationId xmlns:a16="http://schemas.microsoft.com/office/drawing/2014/main" id="{FCBDEB0A-C772-348F-AF81-0DA5E0E0AB2C}"/>
-            </a:ext>
-          </a:extLst>
-        </p:cNvPr>
-        <p:cNvGrpSpPr/>
-        <p:nvPr/>
-      </p:nvGrpSpPr>
-      <p:grpSpPr>
-        <a:xfrm>
-          <a:off x="0" y="0"/>
-          <a:ext cx="0" cy="0"/>
-          <a:chOff x="0" y="0"/>
-          <a:chExt cx="0" cy="0"/>
-        </a:xfrm>
-      </p:grpSpPr>
-      <p:sp>
-        <p:nvSpPr>
-          <p:cNvPr id="77" name="Google Shape;77;g118d7eca593_0_30:notes">
-            <a:extLst>
-              <a:ext uri="{FF2B5EF4-FFF2-40B4-BE49-F238E27FC236}">
-                <a16:creationId xmlns:a16="http://schemas.microsoft.com/office/drawing/2014/main" id="{23B23B72-F599-505C-FC29-4F86ECBBF63C}"/>
-              </a:ext>
-            </a:extLst>
-          </p:cNvPr>
-          <p:cNvSpPr>
-            <a:spLocks noGrp="1" noRot="1" noChangeAspect="1"/>
-          </p:cNvSpPr>
-          <p:nvPr>
-            <p:ph type="sldImg" idx="2"/>
-          </p:nvPr>
-        </p:nvSpPr>
-        <p:spPr>
-          <a:xfrm>
-            <a:off x="381000" y="685800"/>
-            <a:ext cx="6096000" cy="3429000"/>
-          </a:xfrm>
-          <a:custGeom>
-            <a:avLst/>
-            <a:gdLst/>
-            <a:ahLst/>
-            <a:cxnLst/>
-            <a:rect l="l" t="t" r="r" b="b"/>
-            <a:pathLst>
-              <a:path w="120000" h="120000" extrusionOk="0">
-                <a:moveTo>
-                  <a:pt x="0" y="0"/>
-                </a:moveTo>
-                <a:lnTo>
-                  <a:pt x="120000" y="0"/>
-                </a:lnTo>
-                <a:lnTo>
-                  <a:pt x="120000" y="120000"/>
-                </a:lnTo>
-                <a:lnTo>
-                  <a:pt x="0" y="120000"/>
-                </a:lnTo>
-                <a:close/>
-              </a:path>
-            </a:pathLst>
-          </a:custGeom>
-        </p:spPr>
-      </p:sp>
-      <p:sp>
-        <p:nvSpPr>
-          <p:cNvPr id="78" name="Google Shape;78;g118d7eca593_0_30:notes">
-            <a:extLst>
-              <a:ext uri="{FF2B5EF4-FFF2-40B4-BE49-F238E27FC236}">
-                <a16:creationId xmlns:a16="http://schemas.microsoft.com/office/drawing/2014/main" id="{51E07B03-2FC8-03AD-7677-06BA6AB23CBB}"/>
-              </a:ext>
-            </a:extLst>
-          </p:cNvPr>
-          <p:cNvSpPr txBox="1">
-            <a:spLocks noGrp="1"/>
-          </p:cNvSpPr>
-          <p:nvPr>
-            <p:ph type="body" idx="1"/>
-          </p:nvPr>
-        </p:nvSpPr>
-        <p:spPr>
-          <a:xfrm>
-            <a:off x="685800" y="4343400"/>
-            <a:ext cx="5486400" cy="4114800"/>
-          </a:xfrm>
-          <a:prstGeom prst="rect">
-            <a:avLst/>
-          </a:prstGeom>
-        </p:spPr>
-        <p:txBody>
-          <a:bodyPr spcFirstLastPara="1" wrap="square" lIns="91425" tIns="91425" rIns="91425" bIns="91425" anchor="t" anchorCtr="0">
-            <a:noAutofit/>
-          </a:bodyPr>
-          <a:lstStyle/>
-          <a:p>
-            <a:pPr marL="0" lvl="0" indent="0" algn="l" rtl="0">
-              <a:spcBef>
-                <a:spcPts val="0"/>
-              </a:spcBef>
-              <a:spcAft>
-                <a:spcPts val="0"/>
-              </a:spcAft>
-              <a:buNone/>
-            </a:pPr>
-            <a:endParaRPr/>
-          </a:p>
-        </p:txBody>
-      </p:sp>
-    </p:spTree>
-    <p:extLst>
-      <p:ext uri="{BB962C8B-B14F-4D97-AF65-F5344CB8AC3E}">
-        <p14:creationId xmlns:p14="http://schemas.microsoft.com/office/powerpoint/2010/main" val="2112957971"/>
       </p:ext>
     </p:extLst>
   </p:cSld>
@@ -6680,13 +6808,34 @@
               </a:lnSpc>
             </a:pPr>
             <a:r>
-              <a:rPr lang="ko-KR" altLang="en-US" sz="2500" b="1">
+              <a:rPr lang="ko-KR" altLang="en-US" sz="2500" b="1" dirty="0" err="1">
                 <a:solidFill>
                   <a:srgbClr val="19264B"/>
                 </a:solidFill>
               </a:rPr>
-              <a:t>Datathon 6 team</a:t>
-            </a:r>
+              <a:t>Datathon</a:t>
+            </a:r>
+            <a:r>
+              <a:rPr lang="ko-KR" altLang="en-US" sz="2500" b="1" dirty="0">
+                <a:solidFill>
+                  <a:srgbClr val="19264B"/>
+                </a:solidFill>
+              </a:rPr>
+              <a:t> 6 </a:t>
+            </a:r>
+            <a:r>
+              <a:rPr lang="ko-KR" altLang="en-US" sz="2500" b="1" dirty="0" err="1">
+                <a:solidFill>
+                  <a:srgbClr val="19264B"/>
+                </a:solidFill>
+              </a:rPr>
+              <a:t>team</a:t>
+            </a:r>
+            <a:endParaRPr lang="ko-KR" altLang="en-US" sz="2500" b="1" dirty="0">
+              <a:solidFill>
+                <a:srgbClr val="19264B"/>
+              </a:solidFill>
+            </a:endParaRPr>
           </a:p>
           <a:p>
             <a:pPr marL="0" lvl="0" indent="0" algn="l" rtl="0">
@@ -6702,14 +6851,14 @@
               <a:buNone/>
             </a:pPr>
             <a:r>
-              <a:rPr lang="en-US" altLang="ko">
+              <a:rPr lang="en-US" altLang="ko" dirty="0">
                 <a:solidFill>
                   <a:srgbClr val="19264B"/>
                 </a:solidFill>
               </a:rPr>
               <a:t>2026.03.31.</a:t>
             </a:r>
-            <a:endParaRPr>
+            <a:endParaRPr dirty="0">
               <a:solidFill>
                 <a:srgbClr val="19264B"/>
               </a:solidFill>
@@ -6728,7 +6877,7 @@
               </a:spcAft>
               <a:buNone/>
             </a:pPr>
-            <a:endParaRPr>
+            <a:endParaRPr dirty="0">
               <a:solidFill>
                 <a:srgbClr val="19264B"/>
               </a:solidFill>
@@ -6747,7 +6896,7 @@
               </a:spcAft>
               <a:buNone/>
             </a:pPr>
-            <a:endParaRPr>
+            <a:endParaRPr dirty="0">
               <a:solidFill>
                 <a:srgbClr val="19264B"/>
               </a:solidFill>
@@ -6767,14 +6916,30 @@
               <a:buNone/>
             </a:pPr>
             <a:r>
-              <a:rPr lang="ko" sz="1100" b="1">
+              <a:rPr lang="ko" sz="1100" b="1" dirty="0">
                 <a:solidFill>
                   <a:srgbClr val="19264B"/>
                 </a:solidFill>
               </a:rPr>
-              <a:t>발표자: 김승범</a:t>
-            </a:r>
-            <a:endParaRPr lang="ko" altLang="en-US" sz="1100" b="1">
+              <a:t>발표자: </a:t>
+            </a:r>
+            <a:r>
+              <a:rPr lang="ko-KR" altLang="en-US" sz="1100" b="1" dirty="0">
+                <a:solidFill>
+                  <a:srgbClr val="19264B"/>
+                </a:solidFill>
+              </a:rPr>
+              <a:t>소프트웨어학부 </a:t>
+            </a:r>
+            <a:r>
+              <a:rPr lang="ko" sz="1100" b="1" dirty="0">
+                <a:solidFill>
+                  <a:srgbClr val="19264B"/>
+                </a:solidFill>
+              </a:rPr>
+              <a:t>김승범</a:t>
+            </a:r>
+            <a:endParaRPr lang="ko" altLang="en-US" sz="1100" b="1" dirty="0">
               <a:solidFill>
                 <a:srgbClr val="19264B"/>
               </a:solidFill>
@@ -6837,6 +7002,233 @@
         </p:spPr>
       </p:pic>
     </p:spTree>
+  </p:cSld>
+  <p:clrMapOvr>
+    <a:masterClrMapping/>
+  </p:clrMapOvr>
+</p:sld>
+</file>
+
+<file path=ppt/slides/slide10.xml><?xml version="1.0" encoding="utf-8"?>
+<p:sld xmlns:a="http://schemas.openxmlformats.org/drawingml/2006/main" xmlns:r="http://schemas.openxmlformats.org/officeDocument/2006/relationships" xmlns:p="http://schemas.openxmlformats.org/presentationml/2006/main">
+  <p:cSld>
+    <p:spTree>
+      <p:nvGrpSpPr>
+        <p:cNvPr id="1" name="Shape 79">
+          <a:extLst>
+            <a:ext uri="{FF2B5EF4-FFF2-40B4-BE49-F238E27FC236}">
+              <a16:creationId xmlns:a16="http://schemas.microsoft.com/office/drawing/2014/main" id="{3F3D2733-ADA8-8B7A-F3F8-BD56EBBBBDAE}"/>
+            </a:ext>
+          </a:extLst>
+        </p:cNvPr>
+        <p:cNvGrpSpPr/>
+        <p:nvPr/>
+      </p:nvGrpSpPr>
+      <p:grpSpPr>
+        <a:xfrm>
+          <a:off x="0" y="0"/>
+          <a:ext cx="0" cy="0"/>
+          <a:chOff x="0" y="0"/>
+          <a:chExt cx="0" cy="0"/>
+        </a:xfrm>
+      </p:grpSpPr>
+      <p:sp>
+        <p:nvSpPr>
+          <p:cNvPr id="80" name="Google Shape;80;p16">
+            <a:extLst>
+              <a:ext uri="{FF2B5EF4-FFF2-40B4-BE49-F238E27FC236}">
+                <a16:creationId xmlns:a16="http://schemas.microsoft.com/office/drawing/2014/main" id="{2BE7BBD3-478E-E8DC-1F73-C53CDC29626D}"/>
+              </a:ext>
+            </a:extLst>
+          </p:cNvPr>
+          <p:cNvSpPr/>
+          <p:nvPr/>
+        </p:nvSpPr>
+        <p:spPr>
+          <a:xfrm>
+            <a:off x="0" y="-37950"/>
+            <a:ext cx="9184640" cy="5219400"/>
+          </a:xfrm>
+          <a:prstGeom prst="rect">
+            <a:avLst/>
+          </a:prstGeom>
+          <a:solidFill>
+            <a:srgbClr val="19264B"/>
+          </a:solidFill>
+          <a:ln>
+            <a:noFill/>
+          </a:ln>
+        </p:spPr>
+        <p:txBody>
+          <a:bodyPr spcFirstLastPara="1" wrap="square" lIns="91425" tIns="91425" rIns="91425" bIns="91425" anchor="ctr" anchorCtr="0">
+            <a:noAutofit/>
+          </a:bodyPr>
+          <a:lstStyle/>
+          <a:p>
+            <a:pPr marL="0" lvl="0" indent="0" algn="l" rtl="0">
+              <a:spcBef>
+                <a:spcPts val="0"/>
+              </a:spcBef>
+              <a:spcAft>
+                <a:spcPts val="0"/>
+              </a:spcAft>
+              <a:buNone/>
+            </a:pPr>
+            <a:endParaRPr/>
+          </a:p>
+        </p:txBody>
+      </p:sp>
+      <p:cxnSp>
+        <p:nvCxnSpPr>
+          <p:cNvPr id="81" name="Google Shape;81;p16">
+            <a:extLst>
+              <a:ext uri="{FF2B5EF4-FFF2-40B4-BE49-F238E27FC236}">
+                <a16:creationId xmlns:a16="http://schemas.microsoft.com/office/drawing/2014/main" id="{91A39314-F054-AA15-6DB2-98B9A1D00580}"/>
+              </a:ext>
+            </a:extLst>
+          </p:cNvPr>
+          <p:cNvCxnSpPr/>
+          <p:nvPr/>
+        </p:nvCxnSpPr>
+        <p:spPr>
+          <a:xfrm>
+            <a:off x="172875" y="-37950"/>
+            <a:ext cx="0" cy="2187000"/>
+          </a:xfrm>
+          <a:prstGeom prst="straightConnector1">
+            <a:avLst/>
+          </a:prstGeom>
+          <a:noFill/>
+          <a:ln w="38100" cap="flat" cmpd="sng">
+            <a:solidFill>
+              <a:schemeClr val="lt1"/>
+            </a:solidFill>
+            <a:prstDash val="solid"/>
+            <a:round/>
+            <a:headEnd type="none" w="med" len="med"/>
+            <a:tailEnd type="none" w="med" len="med"/>
+          </a:ln>
+        </p:spPr>
+      </p:cxnSp>
+      <p:pic>
+        <p:nvPicPr>
+          <p:cNvPr id="82" name="Google Shape;82;p16">
+            <a:extLst>
+              <a:ext uri="{FF2B5EF4-FFF2-40B4-BE49-F238E27FC236}">
+                <a16:creationId xmlns:a16="http://schemas.microsoft.com/office/drawing/2014/main" id="{AD92993E-C9DC-3773-F505-9AADC3DA8F00}"/>
+              </a:ext>
+            </a:extLst>
+          </p:cNvPr>
+          <p:cNvPicPr preferRelativeResize="0"/>
+          <p:nvPr/>
+        </p:nvPicPr>
+        <p:blipFill>
+          <a:blip r:embed="rId3">
+            <a:alphaModFix/>
+          </a:blip>
+          <a:stretch>
+            <a:fillRect/>
+          </a:stretch>
+        </p:blipFill>
+        <p:spPr>
+          <a:xfrm rot="5400000">
+            <a:off x="-928700" y="3071650"/>
+            <a:ext cx="3038475" cy="1181100"/>
+          </a:xfrm>
+          <a:prstGeom prst="rect">
+            <a:avLst/>
+          </a:prstGeom>
+          <a:noFill/>
+          <a:ln>
+            <a:noFill/>
+          </a:ln>
+        </p:spPr>
+      </p:pic>
+      <p:sp>
+        <p:nvSpPr>
+          <p:cNvPr id="83" name="Google Shape;83;p16">
+            <a:extLst>
+              <a:ext uri="{FF2B5EF4-FFF2-40B4-BE49-F238E27FC236}">
+                <a16:creationId xmlns:a16="http://schemas.microsoft.com/office/drawing/2014/main" id="{3FBA4906-18AE-3C24-BE02-498F5EEEFB7C}"/>
+              </a:ext>
+            </a:extLst>
+          </p:cNvPr>
+          <p:cNvSpPr txBox="1"/>
+          <p:nvPr/>
+        </p:nvSpPr>
+        <p:spPr>
+          <a:xfrm>
+            <a:off x="2739935" y="2125489"/>
+            <a:ext cx="4427945" cy="892522"/>
+          </a:xfrm>
+          <a:prstGeom prst="rect">
+            <a:avLst/>
+          </a:prstGeom>
+          <a:noFill/>
+          <a:ln>
+            <a:noFill/>
+          </a:ln>
+        </p:spPr>
+        <p:txBody>
+          <a:bodyPr spcFirstLastPara="1" wrap="square" lIns="91425" tIns="91425" rIns="91425" bIns="91425" anchor="t" anchorCtr="0">
+            <a:spAutoFit/>
+          </a:bodyPr>
+          <a:lstStyle/>
+          <a:p>
+            <a:pPr marL="0" lvl="0" indent="0" algn="ctr" rtl="0">
+              <a:lnSpc>
+                <a:spcPct val="115000"/>
+              </a:lnSpc>
+              <a:spcBef>
+                <a:spcPts val="0"/>
+              </a:spcBef>
+              <a:spcAft>
+                <a:spcPts val="0"/>
+              </a:spcAft>
+              <a:buNone/>
+            </a:pPr>
+            <a:r>
+              <a:rPr lang="ko-KR" altLang="en-US" sz="4000" b="1">
+                <a:solidFill>
+                  <a:schemeClr val="bg1"/>
+                </a:solidFill>
+                <a:latin typeface="NanumGothic ExtraBold"/>
+                <a:ea typeface="NanumGothic ExtraBold"/>
+                <a:cs typeface="NanumGothic ExtraBold"/>
+                <a:sym typeface="NanumGothic ExtraBold"/>
+              </a:rPr>
+              <a:t>감사합니다</a:t>
+            </a:r>
+            <a:r>
+              <a:rPr lang="en-US" altLang="ko-KR" sz="4000" b="1">
+                <a:solidFill>
+                  <a:schemeClr val="bg1"/>
+                </a:solidFill>
+                <a:latin typeface="NanumGothic ExtraBold"/>
+                <a:ea typeface="NanumGothic ExtraBold"/>
+                <a:cs typeface="NanumGothic ExtraBold"/>
+                <a:sym typeface="NanumGothic ExtraBold"/>
+              </a:rPr>
+              <a:t>. </a:t>
+            </a:r>
+            <a:endParaRPr sz="4000" b="1">
+              <a:solidFill>
+                <a:schemeClr val="bg1"/>
+              </a:solidFill>
+              <a:latin typeface="NanumGothic ExtraBold"/>
+              <a:ea typeface="NanumGothic ExtraBold"/>
+              <a:cs typeface="NanumGothic ExtraBold"/>
+              <a:sym typeface="NanumGothic ExtraBold"/>
+            </a:endParaRPr>
+          </a:p>
+        </p:txBody>
+      </p:sp>
+    </p:spTree>
+    <p:extLst>
+      <p:ext uri="{BB962C8B-B14F-4D97-AF65-F5344CB8AC3E}">
+        <p14:creationId xmlns:p14="http://schemas.microsoft.com/office/powerpoint/2010/main" val="3879176075"/>
+      </p:ext>
+    </p:extLst>
   </p:cSld>
   <p:clrMapOvr>
     <a:masterClrMapping/>
@@ -7023,7 +7415,7 @@
               <a:buNone/>
             </a:pPr>
             <a:r>
-              <a:rPr lang="en-US" sz="2000" b="1">
+              <a:rPr lang="en-US" sz="2000" b="1" dirty="0">
                 <a:solidFill>
                   <a:srgbClr val="19264B"/>
                 </a:solidFill>
@@ -7032,9 +7424,9 @@
                 <a:cs typeface="NanumGothic ExtraBold"/>
                 <a:sym typeface="NanumGothic ExtraBold"/>
               </a:rPr>
-              <a:t>Overview</a:t>
-            </a:r>
-            <a:endParaRPr sz="2000" b="1">
+              <a:t>Team 6</a:t>
+            </a:r>
+            <a:endParaRPr sz="2000" b="1" dirty="0">
               <a:solidFill>
                 <a:srgbClr val="19264B"/>
               </a:solidFill>
@@ -7061,7 +7453,7 @@
         <p:spPr>
           <a:xfrm>
             <a:off x="1473579" y="976284"/>
-            <a:ext cx="4572000" cy="1384995"/>
+            <a:ext cx="4572000" cy="1600438"/>
           </a:xfrm>
           <a:prstGeom prst="rect">
             <a:avLst/>
@@ -7075,58 +7467,38 @@
           <a:lstStyle/>
           <a:p>
             <a:r>
-              <a:rPr lang="ko-KR" altLang="en-US"/>
-              <a:t>비정상 계좌 개설 요청을 탐지하기 위한 모델 구성</a:t>
-            </a:r>
-          </a:p>
-          <a:p>
-            <a:pPr marL="285750" indent="-285750">
-              <a:buFont typeface="Calibri"/>
-              <a:buChar char="-"/>
-            </a:pPr>
-            <a:r>
-              <a:rPr lang="ko-KR" altLang="en-US"/>
-              <a:t>Multi validation strategy &amp; Power Mean ensemble</a:t>
-            </a:r>
-          </a:p>
-          <a:p>
-            <a:pPr marL="285750" indent="-285750">
-              <a:buFont typeface="Calibri"/>
-              <a:buChar char="-"/>
-            </a:pPr>
-            <a:r>
-              <a:rPr lang="ko-KR" altLang="en-US"/>
-              <a:t>Keyword</a:t>
-            </a:r>
-          </a:p>
-          <a:p>
-            <a:pPr marL="742950" lvl="1" indent="-285750">
-              <a:buFont typeface="Courier New"/>
-              <a:buChar char="o"/>
-            </a:pPr>
-            <a:r>
-              <a:rPr lang="ko-KR" altLang="en-US"/>
-              <a:t>Feature Engineering</a:t>
-            </a:r>
-          </a:p>
-          <a:p>
-            <a:pPr marL="742950" lvl="1" indent="-285750">
-              <a:buFont typeface="Courier New"/>
-              <a:buChar char="o"/>
-            </a:pPr>
-            <a:r>
-              <a:rPr lang="ko-KR" altLang="en-US"/>
-              <a:t>K-Fold &amp; OOT Validation</a:t>
-            </a:r>
-          </a:p>
-          <a:p>
-            <a:pPr marL="742950" lvl="1" indent="-285750">
-              <a:buFont typeface="Courier New"/>
-              <a:buChar char="o"/>
-            </a:pPr>
-            <a:r>
-              <a:rPr lang="ko-KR" altLang="en-US"/>
-              <a:t>Power Mean Ensemble</a:t>
+              <a:rPr lang="ko-KR" altLang="en-US" dirty="0"/>
+              <a:t>소프트웨어학부 김현수</a:t>
+            </a:r>
+            <a:endParaRPr lang="en-US" altLang="ko-KR" dirty="0"/>
+          </a:p>
+          <a:p>
+            <a:endParaRPr lang="en-US" altLang="ko-KR" dirty="0"/>
+          </a:p>
+          <a:p>
+            <a:r>
+              <a:rPr lang="ko-KR" altLang="en-US" dirty="0"/>
+              <a:t>소프트웨어학부 김승범</a:t>
+            </a:r>
+            <a:endParaRPr lang="en-US" altLang="ko-KR" dirty="0"/>
+          </a:p>
+          <a:p>
+            <a:endParaRPr lang="en-US" altLang="ko-KR" dirty="0"/>
+          </a:p>
+          <a:p>
+            <a:r>
+              <a:rPr lang="ko-KR" altLang="en-US" dirty="0"/>
+              <a:t>첨단소재공학부 박상현</a:t>
+            </a:r>
+            <a:endParaRPr lang="en-US" altLang="ko-KR" dirty="0"/>
+          </a:p>
+          <a:p>
+            <a:endParaRPr lang="en-US" altLang="ko-KR" dirty="0"/>
+          </a:p>
+          <a:p>
+            <a:r>
+              <a:rPr lang="ko-KR" altLang="en-US" dirty="0"/>
+              <a:t>첨단소재공학부 남동훈</a:t>
             </a:r>
           </a:p>
         </p:txBody>
@@ -7145,6 +7517,377 @@
 </file>
 
 <file path=ppt/slides/slide3.xml><?xml version="1.0" encoding="utf-8"?>
+<p:sld xmlns:a="http://schemas.openxmlformats.org/drawingml/2006/main" xmlns:r="http://schemas.openxmlformats.org/officeDocument/2006/relationships" xmlns:p="http://schemas.openxmlformats.org/presentationml/2006/main">
+  <p:cSld>
+    <p:spTree>
+      <p:nvGrpSpPr>
+        <p:cNvPr id="1" name="Shape 79">
+          <a:extLst>
+            <a:ext uri="{FF2B5EF4-FFF2-40B4-BE49-F238E27FC236}">
+              <a16:creationId xmlns:a16="http://schemas.microsoft.com/office/drawing/2014/main" id="{487B6E63-EE10-D51B-3B20-078E0AAD692B}"/>
+            </a:ext>
+          </a:extLst>
+        </p:cNvPr>
+        <p:cNvGrpSpPr/>
+        <p:nvPr/>
+      </p:nvGrpSpPr>
+      <p:grpSpPr>
+        <a:xfrm>
+          <a:off x="0" y="0"/>
+          <a:ext cx="0" cy="0"/>
+          <a:chOff x="0" y="0"/>
+          <a:chExt cx="0" cy="0"/>
+        </a:xfrm>
+      </p:grpSpPr>
+      <p:sp>
+        <p:nvSpPr>
+          <p:cNvPr id="80" name="Google Shape;80;p16">
+            <a:extLst>
+              <a:ext uri="{FF2B5EF4-FFF2-40B4-BE49-F238E27FC236}">
+                <a16:creationId xmlns:a16="http://schemas.microsoft.com/office/drawing/2014/main" id="{DEC0C6FE-DD48-F220-9D8C-6EB8F57E1780}"/>
+              </a:ext>
+            </a:extLst>
+          </p:cNvPr>
+          <p:cNvSpPr/>
+          <p:nvPr/>
+        </p:nvSpPr>
+        <p:spPr>
+          <a:xfrm>
+            <a:off x="0" y="-37950"/>
+            <a:ext cx="1181100" cy="5219400"/>
+          </a:xfrm>
+          <a:prstGeom prst="rect">
+            <a:avLst/>
+          </a:prstGeom>
+          <a:solidFill>
+            <a:srgbClr val="19264B"/>
+          </a:solidFill>
+          <a:ln>
+            <a:noFill/>
+          </a:ln>
+        </p:spPr>
+        <p:txBody>
+          <a:bodyPr spcFirstLastPara="1" wrap="square" lIns="91425" tIns="91425" rIns="91425" bIns="91425" anchor="ctr" anchorCtr="0">
+            <a:noAutofit/>
+          </a:bodyPr>
+          <a:lstStyle/>
+          <a:p>
+            <a:pPr marL="0" lvl="0" indent="0" algn="l" rtl="0">
+              <a:spcBef>
+                <a:spcPts val="0"/>
+              </a:spcBef>
+              <a:spcAft>
+                <a:spcPts val="0"/>
+              </a:spcAft>
+              <a:buNone/>
+            </a:pPr>
+            <a:endParaRPr/>
+          </a:p>
+        </p:txBody>
+      </p:sp>
+      <p:cxnSp>
+        <p:nvCxnSpPr>
+          <p:cNvPr id="81" name="Google Shape;81;p16">
+            <a:extLst>
+              <a:ext uri="{FF2B5EF4-FFF2-40B4-BE49-F238E27FC236}">
+                <a16:creationId xmlns:a16="http://schemas.microsoft.com/office/drawing/2014/main" id="{811BBC16-096D-5561-E070-DC10F4D59AB6}"/>
+              </a:ext>
+            </a:extLst>
+          </p:cNvPr>
+          <p:cNvCxnSpPr/>
+          <p:nvPr/>
+        </p:nvCxnSpPr>
+        <p:spPr>
+          <a:xfrm>
+            <a:off x="172875" y="-37950"/>
+            <a:ext cx="0" cy="2187000"/>
+          </a:xfrm>
+          <a:prstGeom prst="straightConnector1">
+            <a:avLst/>
+          </a:prstGeom>
+          <a:noFill/>
+          <a:ln w="38100" cap="flat" cmpd="sng">
+            <a:solidFill>
+              <a:schemeClr val="lt1"/>
+            </a:solidFill>
+            <a:prstDash val="solid"/>
+            <a:round/>
+            <a:headEnd type="none" w="med" len="med"/>
+            <a:tailEnd type="none" w="med" len="med"/>
+          </a:ln>
+        </p:spPr>
+      </p:cxnSp>
+      <p:pic>
+        <p:nvPicPr>
+          <p:cNvPr id="82" name="Google Shape;82;p16">
+            <a:extLst>
+              <a:ext uri="{FF2B5EF4-FFF2-40B4-BE49-F238E27FC236}">
+                <a16:creationId xmlns:a16="http://schemas.microsoft.com/office/drawing/2014/main" id="{950B75EA-B038-7D5D-E9F5-E5C66ACDF9BC}"/>
+              </a:ext>
+            </a:extLst>
+          </p:cNvPr>
+          <p:cNvPicPr preferRelativeResize="0"/>
+          <p:nvPr/>
+        </p:nvPicPr>
+        <p:blipFill>
+          <a:blip r:embed="rId3">
+            <a:alphaModFix/>
+          </a:blip>
+          <a:stretch>
+            <a:fillRect/>
+          </a:stretch>
+        </p:blipFill>
+        <p:spPr>
+          <a:xfrm rot="5400000">
+            <a:off x="-928700" y="3071650"/>
+            <a:ext cx="3038475" cy="1181100"/>
+          </a:xfrm>
+          <a:prstGeom prst="rect">
+            <a:avLst/>
+          </a:prstGeom>
+          <a:noFill/>
+          <a:ln>
+            <a:noFill/>
+          </a:ln>
+        </p:spPr>
+      </p:pic>
+      <p:sp>
+        <p:nvSpPr>
+          <p:cNvPr id="83" name="Google Shape;83;p16">
+            <a:extLst>
+              <a:ext uri="{FF2B5EF4-FFF2-40B4-BE49-F238E27FC236}">
+                <a16:creationId xmlns:a16="http://schemas.microsoft.com/office/drawing/2014/main" id="{23B6933E-EADA-D9C6-0D8D-29ED53CF777C}"/>
+              </a:ext>
+            </a:extLst>
+          </p:cNvPr>
+          <p:cNvSpPr txBox="1"/>
+          <p:nvPr/>
+        </p:nvSpPr>
+        <p:spPr>
+          <a:xfrm>
+            <a:off x="1408975" y="306875"/>
+            <a:ext cx="4979400" cy="538579"/>
+          </a:xfrm>
+          <a:prstGeom prst="rect">
+            <a:avLst/>
+          </a:prstGeom>
+          <a:noFill/>
+          <a:ln>
+            <a:noFill/>
+          </a:ln>
+        </p:spPr>
+        <p:txBody>
+          <a:bodyPr spcFirstLastPara="1" wrap="square" lIns="91425" tIns="91425" rIns="91425" bIns="91425" anchor="t" anchorCtr="0">
+            <a:spAutoFit/>
+          </a:bodyPr>
+          <a:lstStyle/>
+          <a:p>
+            <a:pPr marL="0" lvl="0" indent="0" algn="l" rtl="0">
+              <a:lnSpc>
+                <a:spcPct val="115000"/>
+              </a:lnSpc>
+              <a:spcBef>
+                <a:spcPts val="0"/>
+              </a:spcBef>
+              <a:spcAft>
+                <a:spcPts val="0"/>
+              </a:spcAft>
+              <a:buNone/>
+            </a:pPr>
+            <a:r>
+              <a:rPr lang="en-US" sz="2000" b="1" dirty="0">
+                <a:solidFill>
+                  <a:srgbClr val="19264B"/>
+                </a:solidFill>
+                <a:latin typeface="NanumGothic ExtraBold"/>
+                <a:ea typeface="NanumGothic ExtraBold"/>
+                <a:cs typeface="NanumGothic ExtraBold"/>
+                <a:sym typeface="NanumGothic ExtraBold"/>
+              </a:rPr>
+              <a:t>Overview</a:t>
+            </a:r>
+            <a:endParaRPr sz="2000" b="1" dirty="0">
+              <a:solidFill>
+                <a:srgbClr val="19264B"/>
+              </a:solidFill>
+              <a:latin typeface="NanumGothic ExtraBold"/>
+              <a:ea typeface="NanumGothic ExtraBold"/>
+              <a:cs typeface="NanumGothic ExtraBold"/>
+              <a:sym typeface="NanumGothic ExtraBold"/>
+            </a:endParaRPr>
+          </a:p>
+        </p:txBody>
+      </p:sp>
+      <p:sp>
+        <p:nvSpPr>
+          <p:cNvPr id="5" name="TextBox 4">
+            <a:extLst>
+              <a:ext uri="{FF2B5EF4-FFF2-40B4-BE49-F238E27FC236}">
+                <a16:creationId xmlns:a16="http://schemas.microsoft.com/office/drawing/2014/main" id="{13A074B5-1E70-9712-969B-DCAC445C3416}"/>
+              </a:ext>
+            </a:extLst>
+          </p:cNvPr>
+          <p:cNvSpPr txBox="1"/>
+          <p:nvPr/>
+        </p:nvSpPr>
+        <p:spPr>
+          <a:xfrm>
+            <a:off x="1473579" y="976284"/>
+            <a:ext cx="4572000" cy="1600438"/>
+          </a:xfrm>
+          <a:prstGeom prst="rect">
+            <a:avLst/>
+          </a:prstGeom>
+          <a:noFill/>
+        </p:spPr>
+        <p:txBody>
+          <a:bodyPr wrap="square" lIns="91440" tIns="45720" rIns="91440" bIns="45720" anchor="t">
+            <a:spAutoFit/>
+          </a:bodyPr>
+          <a:lstStyle/>
+          <a:p>
+            <a:r>
+              <a:rPr lang="ko-KR" altLang="en-US" dirty="0"/>
+              <a:t>비정상 계좌 개설 요청을 탐지하기 위한 모델 구성</a:t>
+            </a:r>
+          </a:p>
+          <a:p>
+            <a:pPr marL="285750" indent="-285750">
+              <a:buFont typeface="Calibri"/>
+              <a:buChar char="-"/>
+            </a:pPr>
+            <a:r>
+              <a:rPr lang="ko-KR" altLang="en-US" dirty="0" err="1"/>
+              <a:t>Multi</a:t>
+            </a:r>
+            <a:r>
+              <a:rPr lang="ko-KR" altLang="en-US" dirty="0"/>
+              <a:t> </a:t>
+            </a:r>
+            <a:r>
+              <a:rPr lang="ko-KR" altLang="en-US" dirty="0" err="1"/>
+              <a:t>validation</a:t>
+            </a:r>
+            <a:r>
+              <a:rPr lang="ko-KR" altLang="en-US" dirty="0"/>
+              <a:t> </a:t>
+            </a:r>
+            <a:r>
+              <a:rPr lang="ko-KR" altLang="en-US" dirty="0" err="1"/>
+              <a:t>strategy</a:t>
+            </a:r>
+            <a:r>
+              <a:rPr lang="ko-KR" altLang="en-US" dirty="0"/>
+              <a:t> &amp; Power </a:t>
+            </a:r>
+            <a:r>
+              <a:rPr lang="ko-KR" altLang="en-US" dirty="0" err="1"/>
+              <a:t>Mean</a:t>
+            </a:r>
+            <a:r>
+              <a:rPr lang="ko-KR" altLang="en-US" dirty="0"/>
+              <a:t> </a:t>
+            </a:r>
+            <a:r>
+              <a:rPr lang="ko-KR" altLang="en-US" dirty="0" err="1"/>
+              <a:t>ensemble</a:t>
+            </a:r>
+            <a:endParaRPr lang="en-US" altLang="ko-KR" dirty="0"/>
+          </a:p>
+          <a:p>
+            <a:pPr marL="285750" indent="-285750">
+              <a:buFont typeface="Calibri"/>
+              <a:buChar char="-"/>
+            </a:pPr>
+            <a:endParaRPr lang="ko-KR" altLang="en-US" dirty="0"/>
+          </a:p>
+          <a:p>
+            <a:pPr marL="285750" indent="-285750">
+              <a:buFont typeface="Calibri"/>
+              <a:buChar char="-"/>
+            </a:pPr>
+            <a:r>
+              <a:rPr lang="ko-KR" altLang="en-US" dirty="0" err="1"/>
+              <a:t>Keyword</a:t>
+            </a:r>
+            <a:endParaRPr lang="ko-KR" altLang="en-US" dirty="0"/>
+          </a:p>
+          <a:p>
+            <a:pPr marL="742950" lvl="1" indent="-285750">
+              <a:buFont typeface="Courier New"/>
+              <a:buChar char="o"/>
+            </a:pPr>
+            <a:r>
+              <a:rPr lang="ko-KR" altLang="en-US" dirty="0" err="1"/>
+              <a:t>Feature</a:t>
+            </a:r>
+            <a:r>
+              <a:rPr lang="ko-KR" altLang="en-US" dirty="0"/>
+              <a:t> Engineering</a:t>
+            </a:r>
+          </a:p>
+          <a:p>
+            <a:pPr marL="742950" lvl="1" indent="-285750">
+              <a:buFont typeface="Courier New"/>
+              <a:buChar char="o"/>
+            </a:pPr>
+            <a:r>
+              <a:rPr lang="ko-KR" altLang="en-US" dirty="0"/>
+              <a:t>K-</a:t>
+            </a:r>
+            <a:r>
+              <a:rPr lang="ko-KR" altLang="en-US" dirty="0" err="1"/>
+              <a:t>Fold</a:t>
+            </a:r>
+            <a:r>
+              <a:rPr lang="ko-KR" altLang="en-US" dirty="0"/>
+              <a:t> &amp; OOT </a:t>
+            </a:r>
+            <a:r>
+              <a:rPr lang="ko-KR" altLang="en-US" dirty="0" err="1"/>
+              <a:t>Validation</a:t>
+            </a:r>
+            <a:endParaRPr lang="ko-KR" altLang="en-US" dirty="0"/>
+          </a:p>
+          <a:p>
+            <a:pPr marL="742950" lvl="1" indent="-285750">
+              <a:buFont typeface="Courier New"/>
+              <a:buChar char="o"/>
+            </a:pPr>
+            <a:r>
+              <a:rPr lang="ko-KR" altLang="en-US" dirty="0"/>
+              <a:t>Power </a:t>
+            </a:r>
+            <a:r>
+              <a:rPr lang="ko-KR" altLang="en-US" dirty="0" err="1"/>
+              <a:t>Mean</a:t>
+            </a:r>
+            <a:r>
+              <a:rPr lang="ko-KR" altLang="en-US" dirty="0"/>
+              <a:t> </a:t>
+            </a:r>
+            <a:r>
+              <a:rPr lang="ko-KR" altLang="en-US" dirty="0" err="1"/>
+              <a:t>Ensemble</a:t>
+            </a:r>
+            <a:endParaRPr lang="ko-KR" altLang="en-US" dirty="0"/>
+          </a:p>
+        </p:txBody>
+      </p:sp>
+    </p:spTree>
+    <p:extLst>
+      <p:ext uri="{BB962C8B-B14F-4D97-AF65-F5344CB8AC3E}">
+        <p14:creationId xmlns:p14="http://schemas.microsoft.com/office/powerpoint/2010/main" val="4002477859"/>
+      </p:ext>
+    </p:extLst>
+  </p:cSld>
+  <p:clrMapOvr>
+    <a:masterClrMapping/>
+  </p:clrMapOvr>
+</p:sld>
+</file>
+
+<file path=ppt/slides/slide4.xml><?xml version="1.0" encoding="utf-8"?>
 <p:sld xmlns:a="http://schemas.openxmlformats.org/drawingml/2006/main" xmlns:r="http://schemas.openxmlformats.org/officeDocument/2006/relationships" xmlns:p="http://schemas.openxmlformats.org/presentationml/2006/main">
   <p:cSld>
     <p:spTree>
@@ -7343,8 +8086,8 @@
         </p:nvSpPr>
         <p:spPr>
           <a:xfrm>
-            <a:off x="1473579" y="976284"/>
-            <a:ext cx="4572000" cy="954107"/>
+            <a:off x="1473578" y="976284"/>
+            <a:ext cx="5277417" cy="1384995"/>
           </a:xfrm>
           <a:prstGeom prst="rect">
             <a:avLst/>
@@ -7362,19 +8105,25 @@
               <a:buChar char="-"/>
             </a:pPr>
             <a:r>
-              <a:rPr lang="ko-KR" altLang="en-US"/>
-              <a:t>극심한 class 불균현 해결을 문제 해결</a:t>
-            </a:r>
+              <a:rPr lang="ko-KR" altLang="en-US" dirty="0"/>
+              <a:t>극심한 </a:t>
+            </a:r>
+            <a:r>
+              <a:rPr lang="ko-KR" altLang="en-US" dirty="0" err="1"/>
+              <a:t>class</a:t>
+            </a:r>
+            <a:r>
+              <a:rPr lang="ko-KR" altLang="en-US" dirty="0"/>
+              <a:t> 불균형 해결을 문제 해결</a:t>
+            </a:r>
+            <a:endParaRPr lang="en-US" altLang="ko-KR" dirty="0"/>
           </a:p>
           <a:p>
             <a:pPr marL="285750" indent="-285750">
               <a:buFont typeface="Calibri"/>
               <a:buChar char="-"/>
             </a:pPr>
-            <a:r>
-              <a:rPr lang="ko-KR" altLang="en-US"/>
-              <a:t>수많은 정상 거래 속 극 소수의 fraud_bool detection</a:t>
-            </a:r>
+            <a:endParaRPr lang="ko-KR" altLang="en-US" dirty="0"/>
           </a:p>
           <a:p>
             <a:pPr marL="285750" indent="-285750">
@@ -7382,9 +8131,40 @@
               <a:buChar char="-"/>
             </a:pPr>
             <a:r>
-              <a:rPr lang="ko-KR" altLang="en-US" b="1"/>
+              <a:rPr lang="ko-KR" altLang="en-US" dirty="0"/>
+              <a:t>수많은 정상 거래 속 극 소수의 </a:t>
+            </a:r>
+            <a:r>
+              <a:rPr lang="ko-KR" altLang="en-US" dirty="0" err="1"/>
+              <a:t>fraud_bool</a:t>
+            </a:r>
+            <a:r>
+              <a:rPr lang="ko-KR" altLang="en-US" dirty="0"/>
+              <a:t> </a:t>
+            </a:r>
+            <a:r>
+              <a:rPr lang="ko-KR" altLang="en-US" dirty="0" err="1"/>
+              <a:t>detection</a:t>
+            </a:r>
+            <a:endParaRPr lang="en-US" altLang="ko-KR" dirty="0"/>
+          </a:p>
+          <a:p>
+            <a:pPr marL="285750" indent="-285750">
+              <a:buFont typeface="Calibri"/>
+              <a:buChar char="-"/>
+            </a:pPr>
+            <a:endParaRPr lang="ko-KR" altLang="en-US" dirty="0"/>
+          </a:p>
+          <a:p>
+            <a:pPr marL="285750" indent="-285750">
+              <a:buFont typeface="Calibri"/>
+              <a:buChar char="-"/>
+            </a:pPr>
+            <a:r>
+              <a:rPr lang="ko-KR" altLang="en-US" b="1" dirty="0" err="1"/>
               <a:t>Metric</a:t>
             </a:r>
+            <a:endParaRPr lang="ko-KR" altLang="en-US" b="1" dirty="0"/>
           </a:p>
           <a:p>
             <a:pPr marL="742950" lvl="1" indent="-285750">
@@ -7392,8 +8172,12 @@
               <a:buChar char="o"/>
             </a:pPr>
             <a:r>
-              <a:rPr lang="ko-KR" altLang="en-US"/>
-              <a:t>Average Precision (AP)</a:t>
+              <a:rPr lang="ko-KR" altLang="en-US" dirty="0" err="1"/>
+              <a:t>Average</a:t>
+            </a:r>
+            <a:r>
+              <a:rPr lang="ko-KR" altLang="en-US" dirty="0"/>
+              <a:t> Precision (AP)</a:t>
             </a:r>
           </a:p>
         </p:txBody>
@@ -7411,7 +8195,7 @@
 </p:sld>
 </file>
 
-<file path=ppt/slides/slide4.xml><?xml version="1.0" encoding="utf-8"?>
+<file path=ppt/slides/slide5.xml><?xml version="1.0" encoding="utf-8"?>
 <p:sld xmlns:a="http://schemas.openxmlformats.org/drawingml/2006/main" xmlns:r="http://schemas.openxmlformats.org/officeDocument/2006/relationships" xmlns:p="http://schemas.openxmlformats.org/presentationml/2006/main">
   <p:cSld>
     <p:spTree>
@@ -7611,7 +8395,7 @@
         <p:spPr>
           <a:xfrm>
             <a:off x="1430447" y="1030199"/>
-            <a:ext cx="7181490" cy="2246769"/>
+            <a:ext cx="7181490" cy="3323987"/>
           </a:xfrm>
           <a:prstGeom prst="rect">
             <a:avLst/>
@@ -7629,9 +8413,17 @@
               <a:buChar char="-"/>
             </a:pPr>
             <a:r>
-              <a:rPr lang="ko-KR" altLang="en-US"/>
-              <a:t>행동 패턴을 반영한 파생 변수 9종</a:t>
-            </a:r>
+              <a:rPr lang="ko-KR" altLang="en-US" dirty="0"/>
+              <a:t>행동 패턴을 반영한 파생 변수 제작</a:t>
+            </a:r>
+            <a:endParaRPr lang="en-US" altLang="ko-KR" dirty="0"/>
+          </a:p>
+          <a:p>
+            <a:pPr marL="285750" indent="-285750">
+              <a:buFont typeface="Calibri"/>
+              <a:buChar char="-"/>
+            </a:pPr>
+            <a:endParaRPr lang="ko-KR" altLang="en-US" dirty="0"/>
           </a:p>
           <a:p>
             <a:pPr marL="742950" lvl="1" indent="-285750">
@@ -7639,7 +8431,7 @@
               <a:buChar char="o"/>
             </a:pPr>
             <a:r>
-              <a:rPr lang="ko-KR" altLang="en-US"/>
+              <a:rPr lang="ko-KR" altLang="en-US" dirty="0"/>
               <a:t>비율 및 행동 패턴 (단기 이상 탐지)</a:t>
             </a:r>
           </a:p>
@@ -7649,11 +8441,11 @@
               <a:buChar char="§"/>
             </a:pPr>
             <a:r>
-              <a:rPr lang="ko-KR" altLang="en-US" b="1"/>
+              <a:rPr lang="ko-KR" altLang="en-US" b="1" dirty="0" err="1"/>
               <a:t>Req_rate_spike</a:t>
             </a:r>
             <a:r>
-              <a:rPr lang="ko-KR" altLang="en-US"/>
+              <a:rPr lang="ko-KR" altLang="en-US" dirty="0"/>
               <a:t> - 최근 6시간/24시간 요청 비율</a:t>
             </a:r>
           </a:p>
@@ -7663,13 +8455,29 @@
               <a:buChar char="§"/>
             </a:pPr>
             <a:r>
-              <a:rPr lang="ko-KR" altLang="en-US" b="1"/>
+              <a:rPr lang="ko-KR" altLang="en-US" b="1" dirty="0" err="1"/>
               <a:t>Device_email_ratio</a:t>
             </a:r>
             <a:r>
-              <a:rPr lang="ko-KR" altLang="en-US"/>
-              <a:t> – email 계정 수 대비 세션 길이</a:t>
-            </a:r>
+              <a:rPr lang="ko-KR" altLang="en-US" dirty="0"/>
+              <a:t> – </a:t>
+            </a:r>
+            <a:r>
+              <a:rPr lang="ko-KR" altLang="en-US" dirty="0" err="1"/>
+              <a:t>email</a:t>
+            </a:r>
+            <a:r>
+              <a:rPr lang="ko-KR" altLang="en-US" dirty="0"/>
+              <a:t> 계정 수 대비 세션 길이</a:t>
+            </a:r>
+            <a:endParaRPr lang="en-US" altLang="ko-KR" dirty="0"/>
+          </a:p>
+          <a:p>
+            <a:pPr marL="1200150" lvl="2" indent="-285750">
+              <a:buFont typeface="Wingdings"/>
+              <a:buChar char="§"/>
+            </a:pPr>
+            <a:endParaRPr lang="ko-KR" altLang="en-US" dirty="0"/>
           </a:p>
           <a:p>
             <a:pPr marL="742950" lvl="1" indent="-285750">
@@ -7677,8 +8485,12 @@
               <a:buChar char="o"/>
             </a:pPr>
             <a:r>
-              <a:rPr lang="ko-KR" altLang="en-US"/>
-              <a:t>Risk 지표</a:t>
+              <a:rPr lang="ko-KR" altLang="en-US" dirty="0" err="1"/>
+              <a:t>Risk</a:t>
+            </a:r>
+            <a:r>
+              <a:rPr lang="ko-KR" altLang="en-US" dirty="0"/>
+              <a:t> 지표</a:t>
             </a:r>
           </a:p>
           <a:p>
@@ -7687,12 +8499,32 @@
               <a:buChar char="§"/>
             </a:pPr>
             <a:r>
-              <a:rPr lang="ko-KR" altLang="en-US" b="1"/>
-              <a:t>Is_high_risk_email </a:t>
-            </a:r>
-            <a:r>
-              <a:rPr lang="ko-KR" altLang="en-US"/>
-              <a:t>- 이름과 email의 유사도가 낮고 무료 email 사용 비율</a:t>
+              <a:rPr lang="ko-KR" altLang="en-US" b="1" dirty="0" err="1"/>
+              <a:t>Is_high_risk_email</a:t>
+            </a:r>
+            <a:r>
+              <a:rPr lang="ko-KR" altLang="en-US" b="1" dirty="0"/>
+              <a:t> </a:t>
+            </a:r>
+            <a:r>
+              <a:rPr lang="ko-KR" altLang="en-US" dirty="0"/>
+              <a:t>- 이름과 </a:t>
+            </a:r>
+            <a:r>
+              <a:rPr lang="ko-KR" altLang="en-US" dirty="0" err="1"/>
+              <a:t>email의</a:t>
+            </a:r>
+            <a:r>
+              <a:rPr lang="ko-KR" altLang="en-US" dirty="0"/>
+              <a:t> 유사도가 낮고 무료 </a:t>
+            </a:r>
+            <a:r>
+              <a:rPr lang="ko-KR" altLang="en-US" dirty="0" err="1"/>
+              <a:t>email</a:t>
+            </a:r>
+            <a:r>
+              <a:rPr lang="ko-KR" altLang="en-US" dirty="0"/>
+              <a:t> 사용 비율</a:t>
             </a:r>
           </a:p>
           <a:p>
@@ -7701,13 +8533,21 @@
               <a:buChar char="§"/>
             </a:pPr>
             <a:r>
-              <a:rPr lang="ko-KR" altLang="en-US" b="1"/>
+              <a:rPr lang="ko-KR" altLang="en-US" b="1" dirty="0" err="1"/>
               <a:t>Foreign_unstable_risk</a:t>
             </a:r>
             <a:r>
-              <a:rPr lang="ko-KR" altLang="en-US"/>
+              <a:rPr lang="ko-KR" altLang="en-US" dirty="0"/>
               <a:t> - 해외 요청 + 세션 유지 안됨</a:t>
             </a:r>
+            <a:endParaRPr lang="en-US" altLang="ko-KR" dirty="0"/>
+          </a:p>
+          <a:p>
+            <a:pPr marL="1200150" lvl="2" indent="-285750">
+              <a:buFont typeface="Wingdings"/>
+              <a:buChar char="§"/>
+            </a:pPr>
+            <a:endParaRPr lang="ko-KR" altLang="en-US" dirty="0"/>
           </a:p>
           <a:p>
             <a:pPr marL="742950" lvl="1" indent="-285750">
@@ -7715,8 +8555,12 @@
               <a:buChar char="o"/>
             </a:pPr>
             <a:r>
-              <a:rPr lang="ko-KR" altLang="en-US"/>
-              <a:t>Cluster 대비 이상치 (상대적 편차)</a:t>
+              <a:rPr lang="ko-KR" altLang="en-US" dirty="0" err="1"/>
+              <a:t>Cluster</a:t>
+            </a:r>
+            <a:r>
+              <a:rPr lang="ko-KR" altLang="en-US" dirty="0"/>
+              <a:t> 대비 이상치 (상대적 편차)</a:t>
             </a:r>
           </a:p>
           <a:p>
@@ -7725,11 +8569,11 @@
               <a:buChar char="§"/>
             </a:pPr>
             <a:r>
-              <a:rPr lang="ko-KR" altLang="en-US" b="1"/>
+              <a:rPr lang="ko-KR" altLang="en-US" b="1" dirty="0" err="1"/>
               <a:t>Limit_diff_from_age_mean</a:t>
             </a:r>
             <a:r>
-              <a:rPr lang="ko-KR" altLang="en-US"/>
+              <a:rPr lang="ko-KR" altLang="en-US" dirty="0"/>
               <a:t> - 연령대별 평균 한도와의 차이</a:t>
             </a:r>
           </a:p>
@@ -7739,13 +8583,21 @@
               <a:buChar char="§"/>
             </a:pPr>
             <a:r>
-              <a:rPr lang="ko-KR" altLang="en-US" b="1"/>
+              <a:rPr lang="ko-KR" altLang="en-US" b="1" dirty="0" err="1"/>
               <a:t>Income_diff_from_housing_mean</a:t>
             </a:r>
             <a:r>
-              <a:rPr lang="ko-KR" altLang="en-US"/>
+              <a:rPr lang="ko-KR" altLang="en-US" dirty="0"/>
               <a:t> - 주거 형태별 평균 소득과의 차이</a:t>
             </a:r>
+            <a:br>
+              <a:rPr lang="en-US" altLang="ko-KR" dirty="0"/>
+            </a:br>
+            <a:endParaRPr lang="en-US" altLang="ko-KR" dirty="0"/>
+          </a:p>
+          <a:p>
+            <a:pPr marL="914400" lvl="2"/>
+            <a:endParaRPr lang="en-US" altLang="ko-KR" dirty="0"/>
           </a:p>
         </p:txBody>
       </p:sp>
@@ -7762,7 +8614,7 @@
 </p:sld>
 </file>
 
-<file path=ppt/slides/slide5.xml><?xml version="1.0" encoding="utf-8"?>
+<file path=ppt/slides/slide6.xml><?xml version="1.0" encoding="utf-8"?>
 <p:sld xmlns:a="http://schemas.openxmlformats.org/drawingml/2006/main" xmlns:r="http://schemas.openxmlformats.org/officeDocument/2006/relationships" xmlns:p="http://schemas.openxmlformats.org/presentationml/2006/main">
   <p:cSld>
     <p:spTree>
@@ -7977,8 +8829,8 @@
         </p:nvSpPr>
         <p:spPr>
           <a:xfrm>
-            <a:off x="1473579" y="976284"/>
-            <a:ext cx="4572000" cy="1600438"/>
+            <a:off x="1473578" y="976284"/>
+            <a:ext cx="5523851" cy="1600438"/>
           </a:xfrm>
           <a:prstGeom prst="rect">
             <a:avLst/>
@@ -7996,11 +8848,31 @@
               <a:buChar char="-"/>
             </a:pPr>
             <a:r>
-              <a:rPr lang="ko-KR" altLang="en-US" b="1"/>
-              <a:t>Pipeline 1 : K-Fold corss validation</a:t>
-            </a:r>
-            <a:r>
-              <a:rPr lang="ko-KR" altLang="en-US"/>
+              <a:rPr lang="ko-KR" altLang="en-US" b="1" dirty="0"/>
+              <a:t>Pipeline 1 : K-</a:t>
+            </a:r>
+            <a:r>
+              <a:rPr lang="ko-KR" altLang="en-US" b="1" dirty="0" err="1"/>
+              <a:t>Fold</a:t>
+            </a:r>
+            <a:r>
+              <a:rPr lang="ko-KR" altLang="en-US" b="1" dirty="0"/>
+              <a:t> </a:t>
+            </a:r>
+            <a:r>
+              <a:rPr lang="ko-KR" altLang="en-US" b="1" dirty="0" err="1"/>
+              <a:t>corss</a:t>
+            </a:r>
+            <a:r>
+              <a:rPr lang="ko-KR" altLang="en-US" b="1" dirty="0"/>
+              <a:t> </a:t>
+            </a:r>
+            <a:r>
+              <a:rPr lang="ko-KR" altLang="en-US" b="1" dirty="0" err="1"/>
+              <a:t>validation</a:t>
+            </a:r>
+            <a:r>
+              <a:rPr lang="ko-KR" altLang="en-US" dirty="0"/>
               <a:t> </a:t>
             </a:r>
           </a:p>
@@ -8010,9 +8882,18 @@
               <a:buChar char="o"/>
             </a:pPr>
             <a:r>
-              <a:rPr lang="ko-KR" altLang="en-US"/>
-              <a:t>LightGBM, CatBoost</a:t>
-            </a:r>
+              <a:rPr lang="ko-KR" altLang="en-US" dirty="0" err="1"/>
+              <a:t>LightGBM</a:t>
+            </a:r>
+            <a:r>
+              <a:rPr lang="ko-KR" altLang="en-US" dirty="0"/>
+              <a:t>, </a:t>
+            </a:r>
+            <a:r>
+              <a:rPr lang="ko-KR" altLang="en-US" dirty="0" err="1"/>
+              <a:t>CatBoost</a:t>
+            </a:r>
+            <a:endParaRPr lang="ko-KR" altLang="en-US" dirty="0"/>
           </a:p>
           <a:p>
             <a:pPr marL="742950" lvl="1" indent="-285750">
@@ -8020,9 +8901,37 @@
               <a:buChar char="o"/>
             </a:pPr>
             <a:r>
-              <a:rPr lang="ko-KR" altLang="en-US"/>
-              <a:t>Stratified K-Fold로 class 비율 유지</a:t>
-            </a:r>
+              <a:rPr lang="ko-KR" altLang="en-US" dirty="0" err="1"/>
+              <a:t>Stratified</a:t>
+            </a:r>
+            <a:r>
+              <a:rPr lang="ko-KR" altLang="en-US" dirty="0"/>
+              <a:t> K-</a:t>
+            </a:r>
+            <a:r>
+              <a:rPr lang="ko-KR" altLang="en-US" dirty="0" err="1"/>
+              <a:t>Fold로</a:t>
+            </a:r>
+            <a:r>
+              <a:rPr lang="ko-KR" altLang="en-US" dirty="0"/>
+              <a:t> </a:t>
+            </a:r>
+            <a:r>
+              <a:rPr lang="ko-KR" altLang="en-US" dirty="0" err="1"/>
+              <a:t>class</a:t>
+            </a:r>
+            <a:r>
+              <a:rPr lang="ko-KR" altLang="en-US" dirty="0"/>
+              <a:t> 비율 유지</a:t>
+            </a:r>
+            <a:endParaRPr lang="en-US" altLang="ko-KR" dirty="0"/>
+          </a:p>
+          <a:p>
+            <a:pPr marL="742950" lvl="1" indent="-285750">
+              <a:buFont typeface="Courier New"/>
+              <a:buChar char="o"/>
+            </a:pPr>
+            <a:endParaRPr lang="ko-KR" altLang="en-US" dirty="0"/>
           </a:p>
           <a:p>
             <a:pPr marL="285750" indent="-285750">
@@ -8030,8 +8939,16 @@
               <a:buChar char="-"/>
             </a:pPr>
             <a:r>
-              <a:rPr lang="ko-KR" altLang="en-US" b="1"/>
-              <a:t>Pipeline 2 :시계열 기반 validation (OOT)</a:t>
+              <a:rPr lang="ko-KR" altLang="en-US" b="1" dirty="0"/>
+              <a:t>Pipeline 2 :시계열 기반 </a:t>
+            </a:r>
+            <a:r>
+              <a:rPr lang="ko-KR" altLang="en-US" b="1" dirty="0" err="1"/>
+              <a:t>validation</a:t>
+            </a:r>
+            <a:r>
+              <a:rPr lang="ko-KR" altLang="en-US" b="1" dirty="0"/>
+              <a:t> (OOT)</a:t>
             </a:r>
           </a:p>
           <a:p>
@@ -8040,9 +8957,10 @@
               <a:buChar char="o"/>
             </a:pPr>
             <a:r>
-              <a:rPr lang="ko-KR" altLang="en-US"/>
+              <a:rPr lang="ko-KR" altLang="en-US" dirty="0" err="1"/>
               <a:t>XGBoost</a:t>
             </a:r>
+            <a:endParaRPr lang="ko-KR" altLang="en-US" dirty="0"/>
           </a:p>
           <a:p>
             <a:pPr marL="742950" lvl="1" indent="-285750">
@@ -8050,8 +8968,24 @@
               <a:buChar char="o"/>
             </a:pPr>
             <a:r>
-              <a:rPr lang="ko-KR" altLang="en-US"/>
-              <a:t>최근 2개월 데이터를 validation set으로 시간 흐름 반영</a:t>
+              <a:rPr lang="ko-KR" altLang="en-US" dirty="0"/>
+              <a:t>최근 2개월 데이터를 </a:t>
+            </a:r>
+            <a:r>
+              <a:rPr lang="ko-KR" altLang="en-US" dirty="0" err="1"/>
+              <a:t>validation</a:t>
+            </a:r>
+            <a:r>
+              <a:rPr lang="ko-KR" altLang="en-US" dirty="0"/>
+              <a:t> </a:t>
+            </a:r>
+            <a:r>
+              <a:rPr lang="ko-KR" altLang="en-US" dirty="0" err="1"/>
+              <a:t>set으로</a:t>
+            </a:r>
+            <a:r>
+              <a:rPr lang="ko-KR" altLang="en-US" dirty="0"/>
+              <a:t> 시간 흐름 반영</a:t>
             </a:r>
           </a:p>
         </p:txBody>
@@ -8069,7 +9003,7 @@
 </p:sld>
 </file>
 
-<file path=ppt/slides/slide6.xml><?xml version="1.0" encoding="utf-8"?>
+<file path=ppt/slides/slide7.xml><?xml version="1.0" encoding="utf-8"?>
 <p:sld xmlns:a="http://schemas.openxmlformats.org/drawingml/2006/main" xmlns:r="http://schemas.openxmlformats.org/officeDocument/2006/relationships" xmlns:p="http://schemas.openxmlformats.org/presentationml/2006/main">
   <p:cSld>
     <p:spTree>
@@ -8295,7 +9229,7 @@
         <p:spPr>
           <a:xfrm>
             <a:off x="1430447" y="1030199"/>
-            <a:ext cx="6124754" cy="1600438"/>
+            <a:ext cx="6124754" cy="2246769"/>
           </a:xfrm>
           <a:prstGeom prst="rect">
             <a:avLst/>
@@ -8313,9 +9247,21 @@
               <a:buChar char="-"/>
             </a:pPr>
             <a:r>
-              <a:rPr lang="ko-KR" altLang="en-US"/>
-              <a:t>범수형 변수 최적화 및 weight ensemble</a:t>
-            </a:r>
+              <a:rPr lang="ko-KR" altLang="en-US" dirty="0"/>
+              <a:t>범주형 변수 최적화 및 가중치를 두어 </a:t>
+            </a:r>
+            <a:r>
+              <a:rPr lang="ko-KR" altLang="en-US" dirty="0" err="1"/>
+              <a:t>ensemble</a:t>
+            </a:r>
+            <a:endParaRPr lang="en-US" altLang="ko-KR" dirty="0"/>
+          </a:p>
+          <a:p>
+            <a:pPr marL="285750" indent="-285750">
+              <a:buFont typeface="Calibri"/>
+              <a:buChar char="-"/>
+            </a:pPr>
+            <a:endParaRPr lang="ko-KR" altLang="en-US" dirty="0"/>
           </a:p>
           <a:p>
             <a:pPr marL="742950" lvl="1" indent="-285750">
@@ -8323,19 +9269,56 @@
               <a:buChar char="o"/>
             </a:pPr>
             <a:r>
-              <a:rPr lang="ko-KR" altLang="en-US"/>
-              <a:t> Validation method – Stratiified 5-Fold CV</a:t>
-            </a:r>
+              <a:rPr lang="ko-KR" altLang="en-US" dirty="0"/>
+              <a:t> </a:t>
+            </a:r>
+            <a:r>
+              <a:rPr lang="ko-KR" altLang="en-US" dirty="0" err="1"/>
+              <a:t>Validation</a:t>
+            </a:r>
+            <a:r>
+              <a:rPr lang="ko-KR" altLang="en-US" dirty="0"/>
+              <a:t> </a:t>
+            </a:r>
+            <a:r>
+              <a:rPr lang="ko-KR" altLang="en-US" dirty="0" err="1"/>
+              <a:t>method</a:t>
+            </a:r>
+            <a:r>
+              <a:rPr lang="ko-KR" altLang="en-US" dirty="0"/>
+              <a:t> – </a:t>
+            </a:r>
+            <a:r>
+              <a:rPr lang="ko-KR" altLang="en-US" dirty="0" err="1"/>
+              <a:t>Stratiified</a:t>
+            </a:r>
+            <a:r>
+              <a:rPr lang="ko-KR" altLang="en-US" dirty="0"/>
+              <a:t> 5-Fold CV</a:t>
+            </a:r>
+            <a:endParaRPr lang="en-US" altLang="ko-KR" dirty="0"/>
           </a:p>
           <a:p>
             <a:pPr marL="742950" lvl="1" indent="-285750">
               <a:buFont typeface="Courier New"/>
               <a:buChar char="o"/>
             </a:pPr>
-            <a:r>
-              <a:rPr lang="ko-KR" altLang="en-US"/>
-              <a:t>Data preprocessing</a:t>
-            </a:r>
+            <a:endParaRPr lang="ko-KR" altLang="en-US" dirty="0"/>
+          </a:p>
+          <a:p>
+            <a:pPr marL="742950" lvl="1" indent="-285750">
+              <a:buFont typeface="Courier New"/>
+              <a:buChar char="o"/>
+            </a:pPr>
+            <a:r>
+              <a:rPr lang="ko-KR" altLang="en-US" dirty="0"/>
+              <a:t>Data </a:t>
+            </a:r>
+            <a:r>
+              <a:rPr lang="ko-KR" altLang="en-US" dirty="0" err="1"/>
+              <a:t>preprocessing</a:t>
+            </a:r>
+            <a:endParaRPr lang="ko-KR" altLang="en-US" dirty="0"/>
           </a:p>
           <a:p>
             <a:pPr marL="1200150" lvl="2" indent="-285750">
@@ -8343,8 +9326,28 @@
               <a:buChar char="§"/>
             </a:pPr>
             <a:r>
-              <a:rPr lang="ko-KR" altLang="en-US"/>
-              <a:t>LightGBM – Target Encoding 적용 (smoothing 10)</a:t>
+              <a:rPr lang="ko-KR" altLang="en-US" dirty="0" err="1"/>
+              <a:t>LightGBM</a:t>
+            </a:r>
+            <a:r>
+              <a:rPr lang="ko-KR" altLang="en-US" dirty="0"/>
+              <a:t> – Target </a:t>
+            </a:r>
+            <a:r>
+              <a:rPr lang="ko-KR" altLang="en-US" dirty="0" err="1"/>
+              <a:t>Encoding</a:t>
+            </a:r>
+            <a:r>
+              <a:rPr lang="ko-KR" altLang="en-US" dirty="0"/>
+              <a:t> 적용 (</a:t>
+            </a:r>
+            <a:r>
+              <a:rPr lang="ko-KR" altLang="en-US" dirty="0" err="1"/>
+              <a:t>smoothing</a:t>
+            </a:r>
+            <a:r>
+              <a:rPr lang="ko-KR" altLang="en-US" dirty="0"/>
+              <a:t> 10)</a:t>
             </a:r>
           </a:p>
           <a:p>
@@ -8353,9 +9356,37 @@
               <a:buChar char="§"/>
             </a:pPr>
             <a:r>
-              <a:rPr lang="ko-KR" altLang="en-US"/>
-              <a:t>CatBoost – Category Feature 처리</a:t>
-            </a:r>
+              <a:rPr lang="ko-KR" altLang="en-US" dirty="0" err="1"/>
+              <a:t>CatBoost</a:t>
+            </a:r>
+            <a:r>
+              <a:rPr lang="ko-KR" altLang="en-US" dirty="0"/>
+              <a:t> – </a:t>
+            </a:r>
+            <a:r>
+              <a:rPr lang="ko-KR" altLang="en-US" dirty="0" err="1"/>
+              <a:t>Category</a:t>
+            </a:r>
+            <a:r>
+              <a:rPr lang="ko-KR" altLang="en-US" dirty="0"/>
+              <a:t> </a:t>
+            </a:r>
+            <a:r>
+              <a:rPr lang="ko-KR" altLang="en-US" dirty="0" err="1"/>
+              <a:t>Feature</a:t>
+            </a:r>
+            <a:r>
+              <a:rPr lang="ko-KR" altLang="en-US" dirty="0"/>
+              <a:t> 처리</a:t>
+            </a:r>
+            <a:endParaRPr lang="en-US" altLang="ko-KR" dirty="0"/>
+          </a:p>
+          <a:p>
+            <a:pPr marL="1200150" lvl="2" indent="-285750">
+              <a:buFont typeface="Wingdings"/>
+              <a:buChar char="§"/>
+            </a:pPr>
+            <a:endParaRPr lang="ko-KR" altLang="en-US" dirty="0"/>
           </a:p>
           <a:p>
             <a:pPr marL="742950" lvl="1" indent="-285750">
@@ -8363,9 +9394,10 @@
               <a:buChar char="o"/>
             </a:pPr>
             <a:r>
-              <a:rPr lang="ko-KR" altLang="en-US"/>
+              <a:rPr lang="ko-KR" altLang="en-US" dirty="0" err="1"/>
               <a:t>Ensemble</a:t>
             </a:r>
+            <a:endParaRPr lang="ko-KR" altLang="en-US" dirty="0"/>
           </a:p>
           <a:p>
             <a:pPr marL="1200150" lvl="2" indent="-285750">
@@ -8373,8 +9405,16 @@
               <a:buChar char="§"/>
             </a:pPr>
             <a:r>
-              <a:rPr lang="ko-KR" altLang="en-US"/>
-              <a:t>0.05 단위 가중치 탐색으로 최고 validation AP 도출</a:t>
+              <a:rPr lang="ko-KR" altLang="en-US" dirty="0"/>
+              <a:t>0.05 단위 가중치 탐색으로 최고 </a:t>
+            </a:r>
+            <a:r>
+              <a:rPr lang="ko-KR" altLang="en-US" dirty="0" err="1"/>
+              <a:t>validation</a:t>
+            </a:r>
+            <a:r>
+              <a:rPr lang="ko-KR" altLang="en-US" dirty="0"/>
+              <a:t> AP 도출</a:t>
             </a:r>
           </a:p>
         </p:txBody>
@@ -8401,7 +9441,7 @@
         </p:blipFill>
         <p:spPr>
           <a:xfrm>
-            <a:off x="2853636" y="3222415"/>
+            <a:off x="3028734" y="3527603"/>
             <a:ext cx="3921964" cy="585698"/>
           </a:xfrm>
           <a:prstGeom prst="rect">
@@ -8422,7 +9462,7 @@
 </p:sld>
 </file>
 
-<file path=ppt/slides/slide7.xml><?xml version="1.0" encoding="utf-8"?>
+<file path=ppt/slides/slide8.xml><?xml version="1.0" encoding="utf-8"?>
 <p:sld xmlns:a="http://schemas.openxmlformats.org/drawingml/2006/main" xmlns:r="http://schemas.openxmlformats.org/officeDocument/2006/relationships" xmlns:p="http://schemas.openxmlformats.org/presentationml/2006/main">
   <p:cSld>
     <p:spTree>
@@ -8594,16 +9634,16 @@
               </a:lnSpc>
             </a:pPr>
             <a:r>
-              <a:rPr lang="en-US" altLang="ko-KR" sz="2000" b="1">
+              <a:rPr lang="en-US" altLang="ko-KR" sz="2000" b="1" dirty="0">
                 <a:solidFill>
                   <a:srgbClr val="19264B"/>
                 </a:solidFill>
                 <a:latin typeface="NanumGothic ExtraBold"/>
               </a:rPr>
-              <a:t>Pipeline 1 : </a:t>
-            </a:r>
-            <a:r>
-              <a:rPr lang="en-US" altLang="ko-KR" sz="2000" b="1" err="1">
+              <a:t>Pipeline 2 : </a:t>
+            </a:r>
+            <a:r>
+              <a:rPr lang="en-US" altLang="ko-KR" sz="2000" b="1" dirty="0" err="1">
                 <a:solidFill>
                   <a:srgbClr val="19264B"/>
                 </a:solidFill>
@@ -8611,7 +9651,7 @@
               </a:rPr>
               <a:t>XGBoost</a:t>
             </a:r>
-            <a:endParaRPr lang="ko-KR" altLang="en-US" err="1"/>
+            <a:endParaRPr lang="ko-KR" altLang="en-US" dirty="0"/>
           </a:p>
         </p:txBody>
       </p:sp>
@@ -8630,7 +9670,7 @@
         <p:spPr>
           <a:xfrm>
             <a:off x="1430447" y="1030199"/>
-            <a:ext cx="6124754" cy="1169551"/>
+            <a:ext cx="6124754" cy="1600438"/>
           </a:xfrm>
           <a:prstGeom prst="rect">
             <a:avLst/>
@@ -8648,18 +9688,54 @@
               <a:buChar char="-"/>
             </a:pPr>
             <a:r>
-              <a:rPr lang="ko-KR" altLang="en-US"/>
+              <a:rPr lang="ko-KR" altLang="en-US" dirty="0"/>
               <a:t>시간에 따른 데이터 변화 대응</a:t>
             </a:r>
+            <a:endParaRPr lang="en-US" altLang="ko-KR" dirty="0"/>
           </a:p>
           <a:p>
             <a:pPr marL="285750" indent="-285750">
               <a:buFont typeface="Calibri"/>
               <a:buChar char="-"/>
             </a:pPr>
-            <a:r>
-              <a:rPr lang="ko-KR" altLang="en-US"/>
-              <a:t>Validation method – Time-Series OOT (Out-of-Time)</a:t>
+            <a:endParaRPr lang="ko-KR" altLang="en-US" dirty="0"/>
+          </a:p>
+          <a:p>
+            <a:pPr marL="285750" indent="-285750">
+              <a:buFont typeface="Calibri"/>
+              <a:buChar char="-"/>
+            </a:pPr>
+            <a:r>
+              <a:rPr lang="ko-KR" altLang="en-US" dirty="0" err="1"/>
+              <a:t>Validation</a:t>
+            </a:r>
+            <a:r>
+              <a:rPr lang="ko-KR" altLang="en-US" dirty="0"/>
+              <a:t> </a:t>
+            </a:r>
+            <a:r>
+              <a:rPr lang="ko-KR" altLang="en-US" dirty="0" err="1"/>
+              <a:t>method</a:t>
+            </a:r>
+            <a:r>
+              <a:rPr lang="ko-KR" altLang="en-US" dirty="0"/>
+              <a:t> – Time-</a:t>
+            </a:r>
+            <a:r>
+              <a:rPr lang="ko-KR" altLang="en-US" dirty="0" err="1"/>
+              <a:t>Series</a:t>
+            </a:r>
+            <a:r>
+              <a:rPr lang="ko-KR" altLang="en-US" dirty="0"/>
+              <a:t> OOT (</a:t>
+            </a:r>
+            <a:r>
+              <a:rPr lang="ko-KR" altLang="en-US" dirty="0" err="1"/>
+              <a:t>Out</a:t>
+            </a:r>
+            <a:r>
+              <a:rPr lang="ko-KR" altLang="en-US" dirty="0"/>
+              <a:t>-of-Time)</a:t>
             </a:r>
           </a:p>
           <a:p>
@@ -8668,9 +9744,41 @@
               <a:buChar char="o"/>
             </a:pPr>
             <a:r>
-              <a:rPr lang="ko-KR" altLang="en-US"/>
-              <a:t>마지막 2개월을 validation set으로 분리</a:t>
-            </a:r>
+              <a:rPr lang="ko-KR" altLang="en-US" dirty="0"/>
+              <a:t>최근 </a:t>
+            </a:r>
+            <a:r>
+              <a:rPr lang="en-US" altLang="ko-KR" dirty="0"/>
+              <a:t>8</a:t>
+            </a:r>
+            <a:r>
+              <a:rPr lang="ko-KR" altLang="en-US" dirty="0"/>
+              <a:t>개월 중에서 마지막 2개월을 </a:t>
+            </a:r>
+            <a:r>
+              <a:rPr lang="ko-KR" altLang="en-US" dirty="0" err="1"/>
+              <a:t>validation</a:t>
+            </a:r>
+            <a:r>
+              <a:rPr lang="ko-KR" altLang="en-US" dirty="0"/>
+              <a:t> </a:t>
+            </a:r>
+            <a:r>
+              <a:rPr lang="ko-KR" altLang="en-US" dirty="0" err="1"/>
+              <a:t>set으로</a:t>
+            </a:r>
+            <a:r>
+              <a:rPr lang="ko-KR" altLang="en-US" dirty="0"/>
+              <a:t> 분리</a:t>
+            </a:r>
+            <a:endParaRPr lang="en-US" altLang="ko-KR" dirty="0"/>
+          </a:p>
+          <a:p>
+            <a:pPr marL="742950" lvl="1" indent="-285750">
+              <a:buFont typeface="Courier New"/>
+              <a:buChar char="o"/>
+            </a:pPr>
+            <a:endParaRPr lang="ko-KR" altLang="en-US" dirty="0"/>
           </a:p>
           <a:p>
             <a:pPr marL="285750" indent="-285750">
@@ -8678,9 +9786,18 @@
               <a:buChar char="-"/>
             </a:pPr>
             <a:r>
-              <a:rPr lang="ko-KR" altLang="en-US"/>
-              <a:t>Multi-seed ensemble</a:t>
-            </a:r>
+              <a:rPr lang="ko-KR" altLang="en-US" dirty="0" err="1"/>
+              <a:t>Multi-seed</a:t>
+            </a:r>
+            <a:r>
+              <a:rPr lang="ko-KR" altLang="en-US" dirty="0"/>
+              <a:t> </a:t>
+            </a:r>
+            <a:r>
+              <a:rPr lang="ko-KR" altLang="en-US" dirty="0" err="1"/>
+              <a:t>ensemble</a:t>
+            </a:r>
+            <a:endParaRPr lang="ko-KR" altLang="en-US" dirty="0"/>
           </a:p>
           <a:p>
             <a:pPr marL="742950" lvl="1" indent="-285750">
@@ -8688,8 +9805,24 @@
               <a:buChar char="o"/>
             </a:pPr>
             <a:r>
-              <a:rPr lang="ko-KR" altLang="en-US"/>
-              <a:t>2개의 seed (42, 52) 결과를 평균 내어 모델의 variance 감소</a:t>
+              <a:rPr lang="ko-KR" altLang="en-US" dirty="0"/>
+              <a:t>2개의 </a:t>
+            </a:r>
+            <a:r>
+              <a:rPr lang="ko-KR" altLang="en-US" dirty="0" err="1"/>
+              <a:t>seed</a:t>
+            </a:r>
+            <a:r>
+              <a:rPr lang="ko-KR" altLang="en-US" dirty="0"/>
+              <a:t> (42, 52) 결과를 평균 내어 모델의 </a:t>
+            </a:r>
+            <a:r>
+              <a:rPr lang="ko-KR" altLang="en-US" dirty="0" err="1"/>
+              <a:t>variance</a:t>
+            </a:r>
+            <a:r>
+              <a:rPr lang="ko-KR" altLang="en-US" dirty="0"/>
+              <a:t> 감소</a:t>
             </a:r>
           </a:p>
         </p:txBody>
@@ -8707,7 +9840,7 @@
 </p:sld>
 </file>
 
-<file path=ppt/slides/slide8.xml><?xml version="1.0" encoding="utf-8"?>
+<file path=ppt/slides/slide9.xml><?xml version="1.0" encoding="utf-8"?>
 <p:sld xmlns:a="http://schemas.openxmlformats.org/drawingml/2006/main" xmlns:r="http://schemas.openxmlformats.org/officeDocument/2006/relationships" xmlns:p="http://schemas.openxmlformats.org/presentationml/2006/main">
   <p:cSld>
     <p:spTree>
@@ -8905,7 +10038,7 @@
         <p:spPr>
           <a:xfrm>
             <a:off x="1430447" y="1030199"/>
-            <a:ext cx="6124754" cy="1384995"/>
+            <a:ext cx="6572174" cy="1600438"/>
           </a:xfrm>
           <a:prstGeom prst="rect">
             <a:avLst/>
@@ -8923,30 +10056,46 @@
               <a:buChar char="-"/>
             </a:pPr>
             <a:r>
-              <a:rPr lang="ko-KR" altLang="en-US"/>
+              <a:rPr lang="ko-KR" altLang="en-US" dirty="0"/>
               <a:t>확신도를 보존하는 거듭제곱 평균 결합</a:t>
             </a:r>
+            <a:endParaRPr lang="en-US" altLang="ko-KR" dirty="0"/>
           </a:p>
           <a:p>
             <a:pPr marL="285750" indent="-285750">
               <a:buFont typeface="Calibri"/>
               <a:buChar char="-"/>
             </a:pPr>
-            <a:r>
-              <a:rPr lang="ko-KR" altLang="en-US"/>
+            <a:endParaRPr lang="ko-KR" altLang="en-US" dirty="0"/>
+          </a:p>
+          <a:p>
+            <a:pPr marL="285750" indent="-285750">
+              <a:buFont typeface="Calibri"/>
+              <a:buChar char="-"/>
+            </a:pPr>
+            <a:r>
+              <a:rPr lang="ko-KR" altLang="en-US" dirty="0"/>
               <a:t>기존 산술 평균의 한계</a:t>
             </a:r>
+          </a:p>
+          <a:p>
+            <a:pPr marL="457200" lvl="1"/>
+            <a:r>
+              <a:rPr lang="en-US" altLang="ko-KR" dirty="0"/>
+              <a:t>-</a:t>
+            </a:r>
+            <a:r>
+              <a:rPr lang="ko-KR" altLang="en-US" dirty="0"/>
+              <a:t> 한 모델이 사기를 강하게 확신해도, 다른 모델이 낮게 예측하면 값이 희석</a:t>
+            </a:r>
+            <a:endParaRPr lang="en-US" altLang="ko-KR" dirty="0"/>
           </a:p>
           <a:p>
             <a:pPr marL="742950" lvl="1" indent="-285750">
               <a:buFont typeface="Calibri"/>
               <a:buChar char="-"/>
             </a:pPr>
-            <a:r>
-              <a:rPr lang="ko-KR" altLang="en-US"/>
-              <a:t>한 모델이 사기를 강하게 확신해도, 다른 모델이 낮게 예측하면 값이 희석</a:t>
-            </a:r>
-            <a:endParaRPr lang="ko-KR"/>
+            <a:endParaRPr lang="ko-KR" dirty="0"/>
           </a:p>
           <a:p>
             <a:pPr marL="285750" indent="-285750">
@@ -8954,18 +10103,39 @@
               <a:buChar char="-"/>
             </a:pPr>
             <a:r>
-              <a:rPr lang="ko-KR" altLang="en-US"/>
-              <a:t>P=2 Power Mean 적용</a:t>
-            </a:r>
-          </a:p>
-          <a:p>
-            <a:pPr marL="742950" lvl="1" indent="-285750">
-              <a:buFont typeface="Calibri"/>
-              <a:buChar char="-"/>
-            </a:pPr>
-            <a:r>
-              <a:rPr lang="ko-KR" altLang="en-US"/>
-              <a:t>사기일 확률이 높은쪽에 더 많은 가중치 부여</a:t>
+              <a:rPr lang="ko-KR" altLang="en-US" dirty="0" err="1"/>
+              <a:t>P</a:t>
+            </a:r>
+            <a:r>
+              <a:rPr lang="ko-KR" altLang="en-US" dirty="0"/>
+              <a:t>=2 Power </a:t>
+            </a:r>
+            <a:r>
+              <a:rPr lang="ko-KR" altLang="en-US" dirty="0" err="1"/>
+              <a:t>Mean</a:t>
+            </a:r>
+            <a:r>
+              <a:rPr lang="ko-KR" altLang="en-US" dirty="0"/>
+              <a:t> 적용</a:t>
+            </a:r>
+          </a:p>
+          <a:p>
+            <a:pPr marL="457200" lvl="1"/>
+            <a:r>
+              <a:rPr lang="en-US" altLang="ko-KR" dirty="0"/>
+              <a:t>-</a:t>
+            </a:r>
+            <a:r>
+              <a:rPr lang="ko-KR" altLang="en-US" dirty="0"/>
+              <a:t> 사기일 확률이 </a:t>
+            </a:r>
+            <a:r>
+              <a:rPr lang="ko-KR" altLang="en-US" dirty="0" err="1"/>
+              <a:t>높은쪽에</a:t>
+            </a:r>
+            <a:r>
+              <a:rPr lang="ko-KR" altLang="en-US" dirty="0"/>
+              <a:t> 더 많은 가중치 부여</a:t>
             </a:r>
           </a:p>
         </p:txBody>
@@ -9004,233 +10174,6 @@
     <p:extLst>
       <p:ext uri="{BB962C8B-B14F-4D97-AF65-F5344CB8AC3E}">
         <p14:creationId xmlns:p14="http://schemas.microsoft.com/office/powerpoint/2010/main" val="1947938652"/>
-      </p:ext>
-    </p:extLst>
-  </p:cSld>
-  <p:clrMapOvr>
-    <a:masterClrMapping/>
-  </p:clrMapOvr>
-</p:sld>
-</file>
-
-<file path=ppt/slides/slide9.xml><?xml version="1.0" encoding="utf-8"?>
-<p:sld xmlns:a="http://schemas.openxmlformats.org/drawingml/2006/main" xmlns:r="http://schemas.openxmlformats.org/officeDocument/2006/relationships" xmlns:p="http://schemas.openxmlformats.org/presentationml/2006/main">
-  <p:cSld>
-    <p:spTree>
-      <p:nvGrpSpPr>
-        <p:cNvPr id="1" name="Shape 79">
-          <a:extLst>
-            <a:ext uri="{FF2B5EF4-FFF2-40B4-BE49-F238E27FC236}">
-              <a16:creationId xmlns:a16="http://schemas.microsoft.com/office/drawing/2014/main" id="{3F3D2733-ADA8-8B7A-F3F8-BD56EBBBBDAE}"/>
-            </a:ext>
-          </a:extLst>
-        </p:cNvPr>
-        <p:cNvGrpSpPr/>
-        <p:nvPr/>
-      </p:nvGrpSpPr>
-      <p:grpSpPr>
-        <a:xfrm>
-          <a:off x="0" y="0"/>
-          <a:ext cx="0" cy="0"/>
-          <a:chOff x="0" y="0"/>
-          <a:chExt cx="0" cy="0"/>
-        </a:xfrm>
-      </p:grpSpPr>
-      <p:sp>
-        <p:nvSpPr>
-          <p:cNvPr id="80" name="Google Shape;80;p16">
-            <a:extLst>
-              <a:ext uri="{FF2B5EF4-FFF2-40B4-BE49-F238E27FC236}">
-                <a16:creationId xmlns:a16="http://schemas.microsoft.com/office/drawing/2014/main" id="{2BE7BBD3-478E-E8DC-1F73-C53CDC29626D}"/>
-              </a:ext>
-            </a:extLst>
-          </p:cNvPr>
-          <p:cNvSpPr/>
-          <p:nvPr/>
-        </p:nvSpPr>
-        <p:spPr>
-          <a:xfrm>
-            <a:off x="0" y="-37950"/>
-            <a:ext cx="9184640" cy="5219400"/>
-          </a:xfrm>
-          <a:prstGeom prst="rect">
-            <a:avLst/>
-          </a:prstGeom>
-          <a:solidFill>
-            <a:srgbClr val="19264B"/>
-          </a:solidFill>
-          <a:ln>
-            <a:noFill/>
-          </a:ln>
-        </p:spPr>
-        <p:txBody>
-          <a:bodyPr spcFirstLastPara="1" wrap="square" lIns="91425" tIns="91425" rIns="91425" bIns="91425" anchor="ctr" anchorCtr="0">
-            <a:noAutofit/>
-          </a:bodyPr>
-          <a:lstStyle/>
-          <a:p>
-            <a:pPr marL="0" lvl="0" indent="0" algn="l" rtl="0">
-              <a:spcBef>
-                <a:spcPts val="0"/>
-              </a:spcBef>
-              <a:spcAft>
-                <a:spcPts val="0"/>
-              </a:spcAft>
-              <a:buNone/>
-            </a:pPr>
-            <a:endParaRPr/>
-          </a:p>
-        </p:txBody>
-      </p:sp>
-      <p:cxnSp>
-        <p:nvCxnSpPr>
-          <p:cNvPr id="81" name="Google Shape;81;p16">
-            <a:extLst>
-              <a:ext uri="{FF2B5EF4-FFF2-40B4-BE49-F238E27FC236}">
-                <a16:creationId xmlns:a16="http://schemas.microsoft.com/office/drawing/2014/main" id="{91A39314-F054-AA15-6DB2-98B9A1D00580}"/>
-              </a:ext>
-            </a:extLst>
-          </p:cNvPr>
-          <p:cNvCxnSpPr/>
-          <p:nvPr/>
-        </p:nvCxnSpPr>
-        <p:spPr>
-          <a:xfrm>
-            <a:off x="172875" y="-37950"/>
-            <a:ext cx="0" cy="2187000"/>
-          </a:xfrm>
-          <a:prstGeom prst="straightConnector1">
-            <a:avLst/>
-          </a:prstGeom>
-          <a:noFill/>
-          <a:ln w="38100" cap="flat" cmpd="sng">
-            <a:solidFill>
-              <a:schemeClr val="lt1"/>
-            </a:solidFill>
-            <a:prstDash val="solid"/>
-            <a:round/>
-            <a:headEnd type="none" w="med" len="med"/>
-            <a:tailEnd type="none" w="med" len="med"/>
-          </a:ln>
-        </p:spPr>
-      </p:cxnSp>
-      <p:pic>
-        <p:nvPicPr>
-          <p:cNvPr id="82" name="Google Shape;82;p16">
-            <a:extLst>
-              <a:ext uri="{FF2B5EF4-FFF2-40B4-BE49-F238E27FC236}">
-                <a16:creationId xmlns:a16="http://schemas.microsoft.com/office/drawing/2014/main" id="{AD92993E-C9DC-3773-F505-9AADC3DA8F00}"/>
-              </a:ext>
-            </a:extLst>
-          </p:cNvPr>
-          <p:cNvPicPr preferRelativeResize="0"/>
-          <p:nvPr/>
-        </p:nvPicPr>
-        <p:blipFill>
-          <a:blip r:embed="rId3">
-            <a:alphaModFix/>
-          </a:blip>
-          <a:stretch>
-            <a:fillRect/>
-          </a:stretch>
-        </p:blipFill>
-        <p:spPr>
-          <a:xfrm rot="5400000">
-            <a:off x="-928700" y="3071650"/>
-            <a:ext cx="3038475" cy="1181100"/>
-          </a:xfrm>
-          <a:prstGeom prst="rect">
-            <a:avLst/>
-          </a:prstGeom>
-          <a:noFill/>
-          <a:ln>
-            <a:noFill/>
-          </a:ln>
-        </p:spPr>
-      </p:pic>
-      <p:sp>
-        <p:nvSpPr>
-          <p:cNvPr id="83" name="Google Shape;83;p16">
-            <a:extLst>
-              <a:ext uri="{FF2B5EF4-FFF2-40B4-BE49-F238E27FC236}">
-                <a16:creationId xmlns:a16="http://schemas.microsoft.com/office/drawing/2014/main" id="{3FBA4906-18AE-3C24-BE02-498F5EEEFB7C}"/>
-              </a:ext>
-            </a:extLst>
-          </p:cNvPr>
-          <p:cNvSpPr txBox="1"/>
-          <p:nvPr/>
-        </p:nvSpPr>
-        <p:spPr>
-          <a:xfrm>
-            <a:off x="2739935" y="2125489"/>
-            <a:ext cx="4427945" cy="892522"/>
-          </a:xfrm>
-          <a:prstGeom prst="rect">
-            <a:avLst/>
-          </a:prstGeom>
-          <a:noFill/>
-          <a:ln>
-            <a:noFill/>
-          </a:ln>
-        </p:spPr>
-        <p:txBody>
-          <a:bodyPr spcFirstLastPara="1" wrap="square" lIns="91425" tIns="91425" rIns="91425" bIns="91425" anchor="t" anchorCtr="0">
-            <a:spAutoFit/>
-          </a:bodyPr>
-          <a:lstStyle/>
-          <a:p>
-            <a:pPr marL="0" lvl="0" indent="0" algn="ctr" rtl="0">
-              <a:lnSpc>
-                <a:spcPct val="115000"/>
-              </a:lnSpc>
-              <a:spcBef>
-                <a:spcPts val="0"/>
-              </a:spcBef>
-              <a:spcAft>
-                <a:spcPts val="0"/>
-              </a:spcAft>
-              <a:buNone/>
-            </a:pPr>
-            <a:r>
-              <a:rPr lang="ko-KR" altLang="en-US" sz="4000" b="1">
-                <a:solidFill>
-                  <a:schemeClr val="bg1"/>
-                </a:solidFill>
-                <a:latin typeface="NanumGothic ExtraBold"/>
-                <a:ea typeface="NanumGothic ExtraBold"/>
-                <a:cs typeface="NanumGothic ExtraBold"/>
-                <a:sym typeface="NanumGothic ExtraBold"/>
-              </a:rPr>
-              <a:t>감사합니다</a:t>
-            </a:r>
-            <a:r>
-              <a:rPr lang="en-US" altLang="ko-KR" sz="4000" b="1">
-                <a:solidFill>
-                  <a:schemeClr val="bg1"/>
-                </a:solidFill>
-                <a:latin typeface="NanumGothic ExtraBold"/>
-                <a:ea typeface="NanumGothic ExtraBold"/>
-                <a:cs typeface="NanumGothic ExtraBold"/>
-                <a:sym typeface="NanumGothic ExtraBold"/>
-              </a:rPr>
-              <a:t>. </a:t>
-            </a:r>
-            <a:endParaRPr sz="4000" b="1">
-              <a:solidFill>
-                <a:schemeClr val="bg1"/>
-              </a:solidFill>
-              <a:latin typeface="NanumGothic ExtraBold"/>
-              <a:ea typeface="NanumGothic ExtraBold"/>
-              <a:cs typeface="NanumGothic ExtraBold"/>
-              <a:sym typeface="NanumGothic ExtraBold"/>
-            </a:endParaRPr>
-          </a:p>
-        </p:txBody>
-      </p:sp>
-    </p:spTree>
-    <p:extLst>
-      <p:ext uri="{BB962C8B-B14F-4D97-AF65-F5344CB8AC3E}">
-        <p14:creationId xmlns:p14="http://schemas.microsoft.com/office/powerpoint/2010/main" val="3879176075"/>
       </p:ext>
     </p:extLst>
   </p:cSld>
